--- a/output_pptx/Goodness_Of_God.pptx
+++ b/output_pptx/Goodness_Of_God.pptx
@@ -3126,23 +3126,23 @@
         </p:nvSpPr>
         <p:spPr>
           <a:xfrm>
-            <a:off x="594360" y="1837944"/>
-            <a:ext cx="11002975" cy="685800"/>
-          </a:xfrm>
-          <a:prstGeom prst="rect">
-            <a:avLst/>
-          </a:prstGeom>
-          <a:noFill/>
-        </p:spPr>
-        <p:txBody>
-          <a:bodyPr wrap="square">
-            <a:spAutoFit/>
-          </a:bodyPr>
-          <a:lstStyle/>
-          <a:p>
-            <a:pPr algn="ctr"/>
-            <a:r>
-              <a:rPr sz="4400" b="1" i="0">
+            <a:off x="640080" y="1650492"/>
+            <a:ext cx="10911535" cy="731520"/>
+          </a:xfrm>
+          <a:prstGeom prst="rect">
+            <a:avLst/>
+          </a:prstGeom>
+          <a:noFill/>
+        </p:spPr>
+        <p:txBody>
+          <a:bodyPr wrap="square">
+            <a:spAutoFit/>
+          </a:bodyPr>
+          <a:lstStyle/>
+          <a:p>
+            <a:pPr algn="ctr"/>
+            <a:r>
+              <a:rPr sz="4800" b="1" i="0">
                 <a:solidFill>
                   <a:srgbClr val="FFFFFF"/>
                 </a:solidFill>
@@ -3161,8 +3161,8 @@
         </p:nvSpPr>
         <p:spPr>
           <a:xfrm>
-            <a:off x="594360" y="2560320"/>
-            <a:ext cx="11002975" cy="384048"/>
+            <a:off x="640080" y="2418588"/>
+            <a:ext cx="10911535" cy="365760"/>
           </a:xfrm>
           <a:prstGeom prst="rect">
             <a:avLst/>
@@ -3179,7 +3179,7 @@
             <a:r>
               <a:rPr sz="2400" b="0" i="1">
                 <a:solidFill>
-                  <a:srgbClr val="B4B4B4"/>
+                  <a:srgbClr val="AAAAAA"/>
                 </a:solidFill>
                 <a:latin typeface="Arial"/>
               </a:rPr>
@@ -3196,8 +3196,78 @@
         </p:nvSpPr>
         <p:spPr>
           <a:xfrm>
-            <a:off x="594360" y="2980944"/>
-            <a:ext cx="11002975" cy="347472"/>
+            <a:off x="640080" y="2985516"/>
+            <a:ext cx="10911535" cy="731520"/>
+          </a:xfrm>
+          <a:prstGeom prst="rect">
+            <a:avLst/>
+          </a:prstGeom>
+          <a:noFill/>
+        </p:spPr>
+        <p:txBody>
+          <a:bodyPr wrap="square">
+            <a:spAutoFit/>
+          </a:bodyPr>
+          <a:lstStyle/>
+          <a:p>
+            <a:pPr algn="ctr"/>
+            <a:r>
+              <a:rPr sz="4800" b="1" i="0">
+                <a:solidFill>
+                  <a:srgbClr val="FFFFFF"/>
+                </a:solidFill>
+                <a:latin typeface="Arial"/>
+              </a:rPr>
+              <a:t>わた-しは  御手に 抱かれ</a:t>
+            </a:r>
+          </a:p>
+        </p:txBody>
+      </p:sp>
+      <p:sp>
+        <p:nvSpPr>
+          <p:cNvPr id="5" name="TextBox 4"/>
+          <p:cNvSpPr txBox="1"/>
+          <p:nvPr/>
+        </p:nvSpPr>
+        <p:spPr>
+          <a:xfrm>
+            <a:off x="640080" y="3753612"/>
+            <a:ext cx="10911535" cy="365760"/>
+          </a:xfrm>
+          <a:prstGeom prst="rect">
+            <a:avLst/>
+          </a:prstGeom>
+          <a:noFill/>
+        </p:spPr>
+        <p:txBody>
+          <a:bodyPr wrap="square">
+            <a:spAutoFit/>
+          </a:bodyPr>
+          <a:lstStyle/>
+          <a:p>
+            <a:pPr algn="ctr"/>
+            <a:r>
+              <a:rPr sz="2400" b="0" i="1">
+                <a:solidFill>
+                  <a:srgbClr val="AAAAAA"/>
+                </a:solidFill>
+                <a:latin typeface="Arial"/>
+              </a:rPr>
+              <a:t>wata-shi    wa  miteni  idakare</a:t>
+            </a:r>
+          </a:p>
+        </p:txBody>
+      </p:sp>
+      <p:sp>
+        <p:nvSpPr>
+          <p:cNvPr id="6" name="TextBox 5"/>
+          <p:cNvSpPr txBox="1"/>
+          <p:nvPr/>
+        </p:nvSpPr>
+        <p:spPr>
+          <a:xfrm>
+            <a:off x="640080" y="4530852"/>
+            <a:ext cx="10911535" cy="310896"/>
           </a:xfrm>
           <a:prstGeom prst="rect">
             <a:avLst/>
@@ -3214,81 +3284,11 @@
             <a:r>
               <a:rPr sz="2000" b="0" i="1">
                 <a:solidFill>
-                  <a:srgbClr val="8C8C8C"/>
-                </a:solidFill>
-                <a:latin typeface="Arial"/>
-              </a:rPr>
-              <a:t/>
-            </a:r>
-          </a:p>
-        </p:txBody>
-      </p:sp>
-      <p:sp>
-        <p:nvSpPr>
-          <p:cNvPr id="5" name="TextBox 4"/>
-          <p:cNvSpPr txBox="1"/>
-          <p:nvPr/>
-        </p:nvSpPr>
-        <p:spPr>
-          <a:xfrm>
-            <a:off x="594360" y="3529584"/>
-            <a:ext cx="11002975" cy="685800"/>
-          </a:xfrm>
-          <a:prstGeom prst="rect">
-            <a:avLst/>
-          </a:prstGeom>
-          <a:noFill/>
-        </p:spPr>
-        <p:txBody>
-          <a:bodyPr wrap="square">
-            <a:spAutoFit/>
-          </a:bodyPr>
-          <a:lstStyle/>
-          <a:p>
-            <a:pPr algn="ctr"/>
-            <a:r>
-              <a:rPr sz="4400" b="1" i="0">
-                <a:solidFill>
-                  <a:srgbClr val="FFFFFF"/>
-                </a:solidFill>
-                <a:latin typeface="Arial"/>
-              </a:rPr>
-              <a:t>わた-しは  御手に 抱かれ</a:t>
-            </a:r>
-          </a:p>
-        </p:txBody>
-      </p:sp>
-      <p:sp>
-        <p:nvSpPr>
-          <p:cNvPr id="6" name="TextBox 5"/>
-          <p:cNvSpPr txBox="1"/>
-          <p:nvPr/>
-        </p:nvSpPr>
-        <p:spPr>
-          <a:xfrm>
-            <a:off x="594360" y="4251960"/>
-            <a:ext cx="11002975" cy="384048"/>
-          </a:xfrm>
-          <a:prstGeom prst="rect">
-            <a:avLst/>
-          </a:prstGeom>
-          <a:noFill/>
-        </p:spPr>
-        <p:txBody>
-          <a:bodyPr wrap="square">
-            <a:spAutoFit/>
-          </a:bodyPr>
-          <a:lstStyle/>
-          <a:p>
-            <a:pPr algn="ctr"/>
-            <a:r>
-              <a:rPr sz="2400" b="0" i="1">
-                <a:solidFill>
-                  <a:srgbClr val="B4B4B4"/>
-                </a:solidFill>
-                <a:latin typeface="Arial"/>
-              </a:rPr>
-              <a:t>wata-shi    wa  miteni  idakare</a:t>
+                  <a:srgbClr val="828282"/>
+                </a:solidFill>
+                <a:latin typeface="Arial"/>
+              </a:rPr>
+              <a:t>Bondade de Deus</a:t>
             </a:r>
           </a:p>
         </p:txBody>
@@ -3301,8 +3301,8 @@
         </p:nvSpPr>
         <p:spPr>
           <a:xfrm>
-            <a:off x="594360" y="4672584"/>
-            <a:ext cx="11002975" cy="347472"/>
+            <a:off x="640080" y="4896612"/>
+            <a:ext cx="10911535" cy="310896"/>
           </a:xfrm>
           <a:prstGeom prst="rect">
             <a:avLst/>
@@ -3319,11 +3319,11 @@
             <a:r>
               <a:rPr sz="2000" b="0" i="1">
                 <a:solidFill>
-                  <a:srgbClr val="8C8C8C"/>
-                </a:solidFill>
-                <a:latin typeface="Arial"/>
-              </a:rPr>
-              <a:t/>
+                  <a:srgbClr val="828282"/>
+                </a:solidFill>
+                <a:latin typeface="Arial"/>
+              </a:rPr>
+              <a:t>Eu te amo, Senhor</a:t>
             </a:r>
           </a:p>
         </p:txBody>
@@ -3362,23 +3362,23 @@
         </p:nvSpPr>
         <p:spPr>
           <a:xfrm>
-            <a:off x="594360" y="2258568"/>
-            <a:ext cx="11002975" cy="685800"/>
-          </a:xfrm>
-          <a:prstGeom prst="rect">
-            <a:avLst/>
-          </a:prstGeom>
-          <a:noFill/>
-        </p:spPr>
-        <p:txBody>
-          <a:bodyPr wrap="square">
-            <a:spAutoFit/>
-          </a:bodyPr>
-          <a:lstStyle/>
-          <a:p>
-            <a:pPr algn="ctr"/>
-            <a:r>
-              <a:rPr sz="4400" b="1" i="0">
+            <a:off x="640080" y="2052828"/>
+            <a:ext cx="10911535" cy="731520"/>
+          </a:xfrm>
+          <a:prstGeom prst="rect">
+            <a:avLst/>
+          </a:prstGeom>
+          <a:noFill/>
+        </p:spPr>
+        <p:txBody>
+          <a:bodyPr wrap="square">
+            <a:spAutoFit/>
+          </a:bodyPr>
+          <a:lstStyle/>
+          <a:p>
+            <a:pPr algn="ctr"/>
+            <a:r>
+              <a:rPr sz="4800" b="1" i="0">
                 <a:solidFill>
                   <a:srgbClr val="FFFFFF"/>
                 </a:solidFill>
@@ -3397,99 +3397,29 @@
         </p:nvSpPr>
         <p:spPr>
           <a:xfrm>
-            <a:off x="594360" y="2980944"/>
-            <a:ext cx="11002975" cy="347472"/>
-          </a:xfrm>
-          <a:prstGeom prst="rect">
-            <a:avLst/>
-          </a:prstGeom>
-          <a:noFill/>
-        </p:spPr>
-        <p:txBody>
-          <a:bodyPr wrap="square">
-            <a:spAutoFit/>
-          </a:bodyPr>
-          <a:lstStyle/>
-          <a:p>
-            <a:pPr algn="ctr"/>
-            <a:r>
-              <a:rPr sz="2200" b="0" i="1">
-                <a:solidFill>
-                  <a:srgbClr val="8C8C8C"/>
-                </a:solidFill>
-                <a:latin typeface="Arial"/>
-              </a:rPr>
-              <a:t/>
-            </a:r>
-          </a:p>
-        </p:txBody>
-      </p:sp>
-      <p:sp>
-        <p:nvSpPr>
-          <p:cNvPr id="4" name="TextBox 3"/>
-          <p:cNvSpPr txBox="1"/>
-          <p:nvPr/>
-        </p:nvSpPr>
-        <p:spPr>
-          <a:xfrm>
-            <a:off x="594360" y="3529584"/>
-            <a:ext cx="11002975" cy="685800"/>
-          </a:xfrm>
-          <a:prstGeom prst="rect">
-            <a:avLst/>
-          </a:prstGeom>
-          <a:noFill/>
-        </p:spPr>
-        <p:txBody>
-          <a:bodyPr wrap="square">
-            <a:spAutoFit/>
-          </a:bodyPr>
-          <a:lstStyle/>
-          <a:p>
-            <a:pPr algn="ctr"/>
-            <a:r>
-              <a:rPr sz="4400" b="1" i="0">
+            <a:off x="640080" y="2985516"/>
+            <a:ext cx="10911535" cy="731520"/>
+          </a:xfrm>
+          <a:prstGeom prst="rect">
+            <a:avLst/>
+          </a:prstGeom>
+          <a:noFill/>
+        </p:spPr>
+        <p:txBody>
+          <a:bodyPr wrap="square">
+            <a:spAutoFit/>
+          </a:bodyPr>
+          <a:lstStyle/>
+          <a:p>
+            <a:pPr algn="ctr"/>
+            <a:r>
+              <a:rPr sz="4800" b="1" i="0">
                 <a:solidFill>
                   <a:srgbClr val="FFFFFF"/>
                 </a:solidFill>
                 <a:latin typeface="Arial"/>
               </a:rPr>
               <a:t>Estou rendido agora</a:t>
-            </a:r>
-          </a:p>
-        </p:txBody>
-      </p:sp>
-      <p:sp>
-        <p:nvSpPr>
-          <p:cNvPr id="5" name="TextBox 4"/>
-          <p:cNvSpPr txBox="1"/>
-          <p:nvPr/>
-        </p:nvSpPr>
-        <p:spPr>
-          <a:xfrm>
-            <a:off x="594360" y="4251960"/>
-            <a:ext cx="11002975" cy="347472"/>
-          </a:xfrm>
-          <a:prstGeom prst="rect">
-            <a:avLst/>
-          </a:prstGeom>
-          <a:noFill/>
-        </p:spPr>
-        <p:txBody>
-          <a:bodyPr wrap="square">
-            <a:spAutoFit/>
-          </a:bodyPr>
-          <a:lstStyle/>
-          <a:p>
-            <a:pPr algn="ctr"/>
-            <a:r>
-              <a:rPr sz="2200" b="0" i="1">
-                <a:solidFill>
-                  <a:srgbClr val="8C8C8C"/>
-                </a:solidFill>
-                <a:latin typeface="Arial"/>
-              </a:rPr>
-              <a:t/>
             </a:r>
           </a:p>
         </p:txBody>
@@ -3528,23 +3458,23 @@
         </p:nvSpPr>
         <p:spPr>
           <a:xfrm>
-            <a:off x="594360" y="2258568"/>
-            <a:ext cx="11002975" cy="685800"/>
-          </a:xfrm>
-          <a:prstGeom prst="rect">
-            <a:avLst/>
-          </a:prstGeom>
-          <a:noFill/>
-        </p:spPr>
-        <p:txBody>
-          <a:bodyPr wrap="square">
-            <a:spAutoFit/>
-          </a:bodyPr>
-          <a:lstStyle/>
-          <a:p>
-            <a:pPr algn="ctr"/>
-            <a:r>
-              <a:rPr sz="4400" b="1" i="0">
+            <a:off x="640080" y="2052828"/>
+            <a:ext cx="10911535" cy="731520"/>
+          </a:xfrm>
+          <a:prstGeom prst="rect">
+            <a:avLst/>
+          </a:prstGeom>
+          <a:noFill/>
+        </p:spPr>
+        <p:txBody>
+          <a:bodyPr wrap="square">
+            <a:spAutoFit/>
+          </a:bodyPr>
+          <a:lstStyle/>
+          <a:p>
+            <a:pPr algn="ctr"/>
+            <a:r>
+              <a:rPr sz="4800" b="1" i="0">
                 <a:solidFill>
                   <a:srgbClr val="FFFFFF"/>
                 </a:solidFill>
@@ -3563,99 +3493,29 @@
         </p:nvSpPr>
         <p:spPr>
           <a:xfrm>
-            <a:off x="594360" y="2980944"/>
-            <a:ext cx="11002975" cy="347472"/>
-          </a:xfrm>
-          <a:prstGeom prst="rect">
-            <a:avLst/>
-          </a:prstGeom>
-          <a:noFill/>
-        </p:spPr>
-        <p:txBody>
-          <a:bodyPr wrap="square">
-            <a:spAutoFit/>
-          </a:bodyPr>
-          <a:lstStyle/>
-          <a:p>
-            <a:pPr algn="ctr"/>
-            <a:r>
-              <a:rPr sz="2200" b="0" i="1">
-                <a:solidFill>
-                  <a:srgbClr val="8C8C8C"/>
-                </a:solidFill>
-                <a:latin typeface="Arial"/>
-              </a:rPr>
-              <a:t/>
-            </a:r>
-          </a:p>
-        </p:txBody>
-      </p:sp>
-      <p:sp>
-        <p:nvSpPr>
-          <p:cNvPr id="4" name="TextBox 3"/>
-          <p:cNvSpPr txBox="1"/>
-          <p:nvPr/>
-        </p:nvSpPr>
-        <p:spPr>
-          <a:xfrm>
-            <a:off x="594360" y="3529584"/>
-            <a:ext cx="11002975" cy="685800"/>
-          </a:xfrm>
-          <a:prstGeom prst="rect">
-            <a:avLst/>
-          </a:prstGeom>
-          <a:noFill/>
-        </p:spPr>
-        <p:txBody>
-          <a:bodyPr wrap="square">
-            <a:spAutoFit/>
-          </a:bodyPr>
-          <a:lstStyle/>
-          <a:p>
-            <a:pPr algn="ctr"/>
-            <a:r>
-              <a:rPr sz="4400" b="1" i="0">
+            <a:off x="640080" y="2985516"/>
+            <a:ext cx="10911535" cy="731520"/>
+          </a:xfrm>
+          <a:prstGeom prst="rect">
+            <a:avLst/>
+          </a:prstGeom>
+          <a:noFill/>
+        </p:spPr>
+        <p:txBody>
+          <a:bodyPr wrap="square">
+            <a:spAutoFit/>
+          </a:bodyPr>
+          <a:lstStyle/>
+          <a:p>
+            <a:pPr algn="ctr"/>
+            <a:r>
+              <a:rPr sz="4800" b="1" i="0">
                 <a:solidFill>
                   <a:srgbClr val="FFFFFF"/>
                 </a:solidFill>
                 <a:latin typeface="Arial"/>
               </a:rPr>
               <a:t>Com minha vida colocada</a:t>
-            </a:r>
-          </a:p>
-        </p:txBody>
-      </p:sp>
-      <p:sp>
-        <p:nvSpPr>
-          <p:cNvPr id="5" name="TextBox 4"/>
-          <p:cNvSpPr txBox="1"/>
-          <p:nvPr/>
-        </p:nvSpPr>
-        <p:spPr>
-          <a:xfrm>
-            <a:off x="594360" y="4251960"/>
-            <a:ext cx="11002975" cy="347472"/>
-          </a:xfrm>
-          <a:prstGeom prst="rect">
-            <a:avLst/>
-          </a:prstGeom>
-          <a:noFill/>
-        </p:spPr>
-        <p:txBody>
-          <a:bodyPr wrap="square">
-            <a:spAutoFit/>
-          </a:bodyPr>
-          <a:lstStyle/>
-          <a:p>
-            <a:pPr algn="ctr"/>
-            <a:r>
-              <a:rPr sz="2200" b="0" i="1">
-                <a:solidFill>
-                  <a:srgbClr val="8C8C8C"/>
-                </a:solidFill>
-                <a:latin typeface="Arial"/>
-              </a:rPr>
-              <a:t/>
             </a:r>
           </a:p>
         </p:txBody>
@@ -3694,23 +3554,23 @@
         </p:nvSpPr>
         <p:spPr>
           <a:xfrm>
-            <a:off x="594360" y="2258568"/>
-            <a:ext cx="11002975" cy="685800"/>
-          </a:xfrm>
-          <a:prstGeom prst="rect">
-            <a:avLst/>
-          </a:prstGeom>
-          <a:noFill/>
-        </p:spPr>
-        <p:txBody>
-          <a:bodyPr wrap="square">
-            <a:spAutoFit/>
-          </a:bodyPr>
-          <a:lstStyle/>
-          <a:p>
-            <a:pPr algn="ctr"/>
-            <a:r>
-              <a:rPr sz="4400" b="1" i="0">
+            <a:off x="640080" y="2052828"/>
+            <a:ext cx="10911535" cy="731520"/>
+          </a:xfrm>
+          <a:prstGeom prst="rect">
+            <a:avLst/>
+          </a:prstGeom>
+          <a:noFill/>
+        </p:spPr>
+        <p:txBody>
+          <a:bodyPr wrap="square">
+            <a:spAutoFit/>
+          </a:bodyPr>
+          <a:lstStyle/>
+          <a:p>
+            <a:pPr algn="ctr"/>
+            <a:r>
+              <a:rPr sz="4800" b="1" i="0">
                 <a:solidFill>
                   <a:srgbClr val="FFFFFF"/>
                 </a:solidFill>
@@ -3729,99 +3589,29 @@
         </p:nvSpPr>
         <p:spPr>
           <a:xfrm>
-            <a:off x="594360" y="2980944"/>
-            <a:ext cx="11002975" cy="347472"/>
-          </a:xfrm>
-          <a:prstGeom prst="rect">
-            <a:avLst/>
-          </a:prstGeom>
-          <a:noFill/>
-        </p:spPr>
-        <p:txBody>
-          <a:bodyPr wrap="square">
-            <a:spAutoFit/>
-          </a:bodyPr>
-          <a:lstStyle/>
-          <a:p>
-            <a:pPr algn="ctr"/>
-            <a:r>
-              <a:rPr sz="2200" b="0" i="1">
-                <a:solidFill>
-                  <a:srgbClr val="8C8C8C"/>
-                </a:solidFill>
-                <a:latin typeface="Arial"/>
-              </a:rPr>
-              <a:t/>
-            </a:r>
-          </a:p>
-        </p:txBody>
-      </p:sp>
-      <p:sp>
-        <p:nvSpPr>
-          <p:cNvPr id="4" name="TextBox 3"/>
-          <p:cNvSpPr txBox="1"/>
-          <p:nvPr/>
-        </p:nvSpPr>
-        <p:spPr>
-          <a:xfrm>
-            <a:off x="594360" y="3529584"/>
-            <a:ext cx="11002975" cy="685800"/>
-          </a:xfrm>
-          <a:prstGeom prst="rect">
-            <a:avLst/>
-          </a:prstGeom>
-          <a:noFill/>
-        </p:spPr>
-        <p:txBody>
-          <a:bodyPr wrap="square">
-            <a:spAutoFit/>
-          </a:bodyPr>
-          <a:lstStyle/>
-          <a:p>
-            <a:pPr algn="ctr"/>
-            <a:r>
-              <a:rPr sz="4400" b="1" i="0">
+            <a:off x="640080" y="2985516"/>
+            <a:ext cx="10911535" cy="731520"/>
+          </a:xfrm>
+          <a:prstGeom prst="rect">
+            <a:avLst/>
+          </a:prstGeom>
+          <a:noFill/>
+        </p:spPr>
+        <p:txBody>
+          <a:bodyPr wrap="square">
+            <a:spAutoFit/>
+          </a:bodyPr>
+          <a:lstStyle/>
+          <a:p>
+            <a:pPr algn="ctr"/>
+            <a:r>
+              <a:rPr sz="4800" b="1" i="0">
                 <a:solidFill>
                   <a:srgbClr val="FFFFFF"/>
                 </a:solidFill>
                 <a:latin typeface="Arial"/>
               </a:rPr>
               <a:t>Eu te dou tudo</a:t>
-            </a:r>
-          </a:p>
-        </p:txBody>
-      </p:sp>
-      <p:sp>
-        <p:nvSpPr>
-          <p:cNvPr id="5" name="TextBox 4"/>
-          <p:cNvSpPr txBox="1"/>
-          <p:nvPr/>
-        </p:nvSpPr>
-        <p:spPr>
-          <a:xfrm>
-            <a:off x="594360" y="4251960"/>
-            <a:ext cx="11002975" cy="347472"/>
-          </a:xfrm>
-          <a:prstGeom prst="rect">
-            <a:avLst/>
-          </a:prstGeom>
-          <a:noFill/>
-        </p:spPr>
-        <p:txBody>
-          <a:bodyPr wrap="square">
-            <a:spAutoFit/>
-          </a:bodyPr>
-          <a:lstStyle/>
-          <a:p>
-            <a:pPr algn="ctr"/>
-            <a:r>
-              <a:rPr sz="2200" b="0" i="1">
-                <a:solidFill>
-                  <a:srgbClr val="8C8C8C"/>
-                </a:solidFill>
-                <a:latin typeface="Arial"/>
-              </a:rPr>
-              <a:t/>
             </a:r>
           </a:p>
         </p:txBody>
@@ -3860,23 +3650,23 @@
         </p:nvSpPr>
         <p:spPr>
           <a:xfrm>
-            <a:off x="594360" y="2258568"/>
-            <a:ext cx="11002975" cy="685800"/>
-          </a:xfrm>
-          <a:prstGeom prst="rect">
-            <a:avLst/>
-          </a:prstGeom>
-          <a:noFill/>
-        </p:spPr>
-        <p:txBody>
-          <a:bodyPr wrap="square">
-            <a:spAutoFit/>
-          </a:bodyPr>
-          <a:lstStyle/>
-          <a:p>
-            <a:pPr algn="ctr"/>
-            <a:r>
-              <a:rPr sz="4400" b="1" i="0">
+            <a:off x="640080" y="2052828"/>
+            <a:ext cx="10911535" cy="731520"/>
+          </a:xfrm>
+          <a:prstGeom prst="rect">
+            <a:avLst/>
+          </a:prstGeom>
+          <a:noFill/>
+        </p:spPr>
+        <p:txBody>
+          <a:bodyPr wrap="square">
+            <a:spAutoFit/>
+          </a:bodyPr>
+          <a:lstStyle/>
+          <a:p>
+            <a:pPr algn="ctr"/>
+            <a:r>
+              <a:rPr sz="4800" b="1" i="0">
                 <a:solidFill>
                   <a:srgbClr val="FFFFFF"/>
                 </a:solidFill>
@@ -3895,25 +3685,60 @@
         </p:nvSpPr>
         <p:spPr>
           <a:xfrm>
-            <a:off x="594360" y="2980944"/>
-            <a:ext cx="11002975" cy="347472"/>
-          </a:xfrm>
-          <a:prstGeom prst="rect">
-            <a:avLst/>
-          </a:prstGeom>
-          <a:noFill/>
-        </p:spPr>
-        <p:txBody>
-          <a:bodyPr wrap="square">
-            <a:spAutoFit/>
-          </a:bodyPr>
-          <a:lstStyle/>
-          <a:p>
-            <a:pPr algn="ctr"/>
-            <a:r>
-              <a:rPr sz="2200" b="0" i="1">
-                <a:solidFill>
-                  <a:srgbClr val="8C8C8C"/>
+            <a:off x="640080" y="2985516"/>
+            <a:ext cx="10911535" cy="731520"/>
+          </a:xfrm>
+          <a:prstGeom prst="rect">
+            <a:avLst/>
+          </a:prstGeom>
+          <a:noFill/>
+        </p:spPr>
+        <p:txBody>
+          <a:bodyPr wrap="square">
+            <a:spAutoFit/>
+          </a:bodyPr>
+          <a:lstStyle/>
+          <a:p>
+            <a:pPr algn="ctr"/>
+            <a:r>
+              <a:rPr sz="4600" b="1" i="0">
+                <a:solidFill>
+                  <a:srgbClr val="FFFFFF"/>
+                </a:solidFill>
+                <a:latin typeface="Arial"/>
+              </a:rPr>
+              <a:t>Você está perto como nenhum outro</a:t>
+            </a:r>
+          </a:p>
+        </p:txBody>
+      </p:sp>
+      <p:sp>
+        <p:nvSpPr>
+          <p:cNvPr id="4" name="TextBox 3"/>
+          <p:cNvSpPr txBox="1"/>
+          <p:nvPr/>
+        </p:nvSpPr>
+        <p:spPr>
+          <a:xfrm>
+            <a:off x="640080" y="4128516"/>
+            <a:ext cx="10911535" cy="310896"/>
+          </a:xfrm>
+          <a:prstGeom prst="rect">
+            <a:avLst/>
+          </a:prstGeom>
+          <a:noFill/>
+        </p:spPr>
+        <p:txBody>
+          <a:bodyPr wrap="square">
+            <a:spAutoFit/>
+          </a:bodyPr>
+          <a:lstStyle/>
+          <a:p>
+            <a:pPr algn="ctr"/>
+            <a:r>
+              <a:rPr sz="2000" b="0" i="0">
+                <a:solidFill>
+                  <a:srgbClr val="828282"/>
                 </a:solidFill>
                 <a:latin typeface="Arial"/>
               </a:rPr>
@@ -3924,66 +3749,31 @@
       </p:sp>
       <p:sp>
         <p:nvSpPr>
-          <p:cNvPr id="4" name="TextBox 3"/>
-          <p:cNvSpPr txBox="1"/>
-          <p:nvPr/>
-        </p:nvSpPr>
-        <p:spPr>
-          <a:xfrm>
-            <a:off x="594360" y="3529584"/>
-            <a:ext cx="11002975" cy="685800"/>
-          </a:xfrm>
-          <a:prstGeom prst="rect">
-            <a:avLst/>
-          </a:prstGeom>
-          <a:noFill/>
-        </p:spPr>
-        <p:txBody>
-          <a:bodyPr wrap="square">
-            <a:spAutoFit/>
-          </a:bodyPr>
-          <a:lstStyle/>
-          <a:p>
-            <a:pPr algn="ctr"/>
-            <a:r>
-              <a:rPr sz="4266" b="1" i="0">
-                <a:solidFill>
-                  <a:srgbClr val="FFFFFF"/>
-                </a:solidFill>
-                <a:latin typeface="Arial"/>
-              </a:rPr>
-              <a:t>Você está perto como nenhum outro</a:t>
-            </a:r>
-          </a:p>
-        </p:txBody>
-      </p:sp>
-      <p:sp>
-        <p:nvSpPr>
           <p:cNvPr id="5" name="TextBox 4"/>
           <p:cNvSpPr txBox="1"/>
           <p:nvPr/>
         </p:nvSpPr>
         <p:spPr>
           <a:xfrm>
-            <a:off x="594360" y="4251960"/>
-            <a:ext cx="11002975" cy="347472"/>
-          </a:xfrm>
-          <a:prstGeom prst="rect">
-            <a:avLst/>
-          </a:prstGeom>
-          <a:noFill/>
-        </p:spPr>
-        <p:txBody>
-          <a:bodyPr wrap="square">
-            <a:spAutoFit/>
-          </a:bodyPr>
-          <a:lstStyle/>
-          <a:p>
-            <a:pPr algn="ctr"/>
-            <a:r>
-              <a:rPr sz="2200" b="0" i="1">
-                <a:solidFill>
-                  <a:srgbClr val="8C8C8C"/>
+            <a:off x="640080" y="4494276"/>
+            <a:ext cx="10911535" cy="310896"/>
+          </a:xfrm>
+          <a:prstGeom prst="rect">
+            <a:avLst/>
+          </a:prstGeom>
+          <a:noFill/>
+        </p:spPr>
+        <p:txBody>
+          <a:bodyPr wrap="square">
+            <a:spAutoFit/>
+          </a:bodyPr>
+          <a:lstStyle/>
+          <a:p>
+            <a:pPr algn="ctr"/>
+            <a:r>
+              <a:rPr sz="2000" b="0" i="0">
+                <a:solidFill>
+                  <a:srgbClr val="828282"/>
                 </a:solidFill>
                 <a:latin typeface="Arial"/>
               </a:rPr>
@@ -4026,23 +3816,23 @@
         </p:nvSpPr>
         <p:spPr>
           <a:xfrm>
-            <a:off x="594360" y="2258568"/>
-            <a:ext cx="11002975" cy="685800"/>
-          </a:xfrm>
-          <a:prstGeom prst="rect">
-            <a:avLst/>
-          </a:prstGeom>
-          <a:noFill/>
-        </p:spPr>
-        <p:txBody>
-          <a:bodyPr wrap="square">
-            <a:spAutoFit/>
-          </a:bodyPr>
-          <a:lstStyle/>
-          <a:p>
-            <a:pPr algn="ctr"/>
-            <a:r>
-              <a:rPr sz="4400" b="1" i="0">
+            <a:off x="640080" y="2052828"/>
+            <a:ext cx="10911535" cy="731520"/>
+          </a:xfrm>
+          <a:prstGeom prst="rect">
+            <a:avLst/>
+          </a:prstGeom>
+          <a:noFill/>
+        </p:spPr>
+        <p:txBody>
+          <a:bodyPr wrap="square">
+            <a:spAutoFit/>
+          </a:bodyPr>
+          <a:lstStyle/>
+          <a:p>
+            <a:pPr algn="ctr"/>
+            <a:r>
+              <a:rPr sz="4800" b="1" i="0">
                 <a:solidFill>
                   <a:srgbClr val="FFFFFF"/>
                 </a:solidFill>
@@ -4061,25 +3851,60 @@
         </p:nvSpPr>
         <p:spPr>
           <a:xfrm>
-            <a:off x="594360" y="2980944"/>
-            <a:ext cx="11002975" cy="347472"/>
-          </a:xfrm>
-          <a:prstGeom prst="rect">
-            <a:avLst/>
-          </a:prstGeom>
-          <a:noFill/>
-        </p:spPr>
-        <p:txBody>
-          <a:bodyPr wrap="square">
-            <a:spAutoFit/>
-          </a:bodyPr>
-          <a:lstStyle/>
-          <a:p>
-            <a:pPr algn="ctr"/>
-            <a:r>
-              <a:rPr sz="2200" b="0" i="1">
-                <a:solidFill>
-                  <a:srgbClr val="8C8C8C"/>
+            <a:off x="640080" y="2985516"/>
+            <a:ext cx="10911535" cy="731520"/>
+          </a:xfrm>
+          <a:prstGeom prst="rect">
+            <a:avLst/>
+          </a:prstGeom>
+          <a:noFill/>
+        </p:spPr>
+        <p:txBody>
+          <a:bodyPr wrap="square">
+            <a:spAutoFit/>
+          </a:bodyPr>
+          <a:lstStyle/>
+          <a:p>
+            <a:pPr algn="ctr"/>
+            <a:r>
+              <a:rPr sz="4800" b="1" i="0">
+                <a:solidFill>
+                  <a:srgbClr val="FFFFFF"/>
+                </a:solidFill>
+                <a:latin typeface="Arial"/>
+              </a:rPr>
+              <a:t>Eu te conheci como um amigo</a:t>
+            </a:r>
+          </a:p>
+        </p:txBody>
+      </p:sp>
+      <p:sp>
+        <p:nvSpPr>
+          <p:cNvPr id="4" name="TextBox 3"/>
+          <p:cNvSpPr txBox="1"/>
+          <p:nvPr/>
+        </p:nvSpPr>
+        <p:spPr>
+          <a:xfrm>
+            <a:off x="640080" y="4128516"/>
+            <a:ext cx="10911535" cy="310896"/>
+          </a:xfrm>
+          <a:prstGeom prst="rect">
+            <a:avLst/>
+          </a:prstGeom>
+          <a:noFill/>
+        </p:spPr>
+        <p:txBody>
+          <a:bodyPr wrap="square">
+            <a:spAutoFit/>
+          </a:bodyPr>
+          <a:lstStyle/>
+          <a:p>
+            <a:pPr algn="ctr"/>
+            <a:r>
+              <a:rPr sz="2000" b="0" i="0">
+                <a:solidFill>
+                  <a:srgbClr val="828282"/>
                 </a:solidFill>
                 <a:latin typeface="Arial"/>
               </a:rPr>
@@ -4090,66 +3915,31 @@
       </p:sp>
       <p:sp>
         <p:nvSpPr>
-          <p:cNvPr id="4" name="TextBox 3"/>
-          <p:cNvSpPr txBox="1"/>
-          <p:nvPr/>
-        </p:nvSpPr>
-        <p:spPr>
-          <a:xfrm>
-            <a:off x="594360" y="3529584"/>
-            <a:ext cx="11002975" cy="685800"/>
-          </a:xfrm>
-          <a:prstGeom prst="rect">
-            <a:avLst/>
-          </a:prstGeom>
-          <a:noFill/>
-        </p:spPr>
-        <p:txBody>
-          <a:bodyPr wrap="square">
-            <a:spAutoFit/>
-          </a:bodyPr>
-          <a:lstStyle/>
-          <a:p>
-            <a:pPr algn="ctr"/>
-            <a:r>
-              <a:rPr sz="4400" b="1" i="0">
-                <a:solidFill>
-                  <a:srgbClr val="FFFFFF"/>
-                </a:solidFill>
-                <a:latin typeface="Arial"/>
-              </a:rPr>
-              <a:t>Eu te conheci como um amigo</a:t>
-            </a:r>
-          </a:p>
-        </p:txBody>
-      </p:sp>
-      <p:sp>
-        <p:nvSpPr>
           <p:cNvPr id="5" name="TextBox 4"/>
           <p:cNvSpPr txBox="1"/>
           <p:nvPr/>
         </p:nvSpPr>
         <p:spPr>
           <a:xfrm>
-            <a:off x="594360" y="4251960"/>
-            <a:ext cx="11002975" cy="347472"/>
-          </a:xfrm>
-          <a:prstGeom prst="rect">
-            <a:avLst/>
-          </a:prstGeom>
-          <a:noFill/>
-        </p:spPr>
-        <p:txBody>
-          <a:bodyPr wrap="square">
-            <a:spAutoFit/>
-          </a:bodyPr>
-          <a:lstStyle/>
-          <a:p>
-            <a:pPr algn="ctr"/>
-            <a:r>
-              <a:rPr sz="2200" b="0" i="1">
-                <a:solidFill>
-                  <a:srgbClr val="8C8C8C"/>
+            <a:off x="640080" y="4494276"/>
+            <a:ext cx="10911535" cy="310896"/>
+          </a:xfrm>
+          <a:prstGeom prst="rect">
+            <a:avLst/>
+          </a:prstGeom>
+          <a:noFill/>
+        </p:spPr>
+        <p:txBody>
+          <a:bodyPr wrap="square">
+            <a:spAutoFit/>
+          </a:bodyPr>
+          <a:lstStyle/>
+          <a:p>
+            <a:pPr algn="ctr"/>
+            <a:r>
+              <a:rPr sz="2000" b="0" i="0">
+                <a:solidFill>
+                  <a:srgbClr val="828282"/>
                 </a:solidFill>
                 <a:latin typeface="Arial"/>
               </a:rPr>
@@ -4192,23 +3982,23 @@
         </p:nvSpPr>
         <p:spPr>
           <a:xfrm>
-            <a:off x="594360" y="2258568"/>
-            <a:ext cx="11002975" cy="685800"/>
-          </a:xfrm>
-          <a:prstGeom prst="rect">
-            <a:avLst/>
-          </a:prstGeom>
-          <a:noFill/>
-        </p:spPr>
-        <p:txBody>
-          <a:bodyPr wrap="square">
-            <a:spAutoFit/>
-          </a:bodyPr>
-          <a:lstStyle/>
-          <a:p>
-            <a:pPr algn="ctr"/>
-            <a:r>
-              <a:rPr sz="3911" b="1" i="0">
+            <a:off x="640080" y="2052828"/>
+            <a:ext cx="10911535" cy="731520"/>
+          </a:xfrm>
+          <a:prstGeom prst="rect">
+            <a:avLst/>
+          </a:prstGeom>
+          <a:noFill/>
+        </p:spPr>
+        <p:txBody>
+          <a:bodyPr wrap="square">
+            <a:spAutoFit/>
+          </a:bodyPr>
+          <a:lstStyle/>
+          <a:p>
+            <a:pPr algn="ctr"/>
+            <a:r>
+              <a:rPr sz="4200" b="1" i="0">
                 <a:solidFill>
                   <a:srgbClr val="FFFFFF"/>
                 </a:solidFill>
@@ -4227,99 +4017,29 @@
         </p:nvSpPr>
         <p:spPr>
           <a:xfrm>
-            <a:off x="594360" y="2980944"/>
-            <a:ext cx="11002975" cy="347472"/>
-          </a:xfrm>
-          <a:prstGeom prst="rect">
-            <a:avLst/>
-          </a:prstGeom>
-          <a:noFill/>
-        </p:spPr>
-        <p:txBody>
-          <a:bodyPr wrap="square">
-            <a:spAutoFit/>
-          </a:bodyPr>
-          <a:lstStyle/>
-          <a:p>
-            <a:pPr algn="ctr"/>
-            <a:r>
-              <a:rPr sz="2200" b="0" i="1">
-                <a:solidFill>
-                  <a:srgbClr val="8C8C8C"/>
-                </a:solidFill>
-                <a:latin typeface="Arial"/>
-              </a:rPr>
-              <a:t/>
-            </a:r>
-          </a:p>
-        </p:txBody>
-      </p:sp>
-      <p:sp>
-        <p:nvSpPr>
-          <p:cNvPr id="4" name="TextBox 3"/>
-          <p:cNvSpPr txBox="1"/>
-          <p:nvPr/>
-        </p:nvSpPr>
-        <p:spPr>
-          <a:xfrm>
-            <a:off x="594360" y="3529584"/>
-            <a:ext cx="11002975" cy="685800"/>
-          </a:xfrm>
-          <a:prstGeom prst="rect">
-            <a:avLst/>
-          </a:prstGeom>
-          <a:noFill/>
-        </p:spPr>
-        <p:txBody>
-          <a:bodyPr wrap="square">
-            <a:spAutoFit/>
-          </a:bodyPr>
-          <a:lstStyle/>
-          <a:p>
-            <a:pPr algn="ctr"/>
-            <a:r>
-              <a:rPr sz="3911" b="1" i="0">
+            <a:off x="640080" y="2985516"/>
+            <a:ext cx="10911535" cy="731520"/>
+          </a:xfrm>
+          <a:prstGeom prst="rect">
+            <a:avLst/>
+          </a:prstGeom>
+          <a:noFill/>
+        </p:spPr>
+        <p:txBody>
+          <a:bodyPr wrap="square">
+            <a:spAutoFit/>
+          </a:bodyPr>
+          <a:lstStyle/>
+          <a:p>
+            <a:pPr algn="ctr"/>
+            <a:r>
+              <a:rPr sz="4200" b="1" i="0">
                 <a:solidFill>
                   <a:srgbClr val="FFFFFF"/>
                 </a:solidFill>
                 <a:latin typeface="Arial"/>
               </a:rPr>
               <a:t>Toda a minha vida Você tem sido fiel</a:t>
-            </a:r>
-          </a:p>
-        </p:txBody>
-      </p:sp>
-      <p:sp>
-        <p:nvSpPr>
-          <p:cNvPr id="5" name="TextBox 4"/>
-          <p:cNvSpPr txBox="1"/>
-          <p:nvPr/>
-        </p:nvSpPr>
-        <p:spPr>
-          <a:xfrm>
-            <a:off x="594360" y="4251960"/>
-            <a:ext cx="11002975" cy="347472"/>
-          </a:xfrm>
-          <a:prstGeom prst="rect">
-            <a:avLst/>
-          </a:prstGeom>
-          <a:noFill/>
-        </p:spPr>
-        <p:txBody>
-          <a:bodyPr wrap="square">
-            <a:spAutoFit/>
-          </a:bodyPr>
-          <a:lstStyle/>
-          <a:p>
-            <a:pPr algn="ctr"/>
-            <a:r>
-              <a:rPr sz="2200" b="0" i="1">
-                <a:solidFill>
-                  <a:srgbClr val="8C8C8C"/>
-                </a:solidFill>
-                <a:latin typeface="Arial"/>
-              </a:rPr>
-              <a:t/>
             </a:r>
           </a:p>
         </p:txBody>
@@ -4358,23 +4078,23 @@
         </p:nvSpPr>
         <p:spPr>
           <a:xfrm>
-            <a:off x="594360" y="2258568"/>
-            <a:ext cx="11002975" cy="685800"/>
-          </a:xfrm>
-          <a:prstGeom prst="rect">
-            <a:avLst/>
-          </a:prstGeom>
-          <a:noFill/>
-        </p:spPr>
-        <p:txBody>
-          <a:bodyPr wrap="square">
-            <a:spAutoFit/>
-          </a:bodyPr>
-          <a:lstStyle/>
-          <a:p>
-            <a:pPr algn="ctr"/>
-            <a:r>
-              <a:rPr sz="3610" b="1" i="0">
+            <a:off x="640080" y="2052828"/>
+            <a:ext cx="10911535" cy="731520"/>
+          </a:xfrm>
+          <a:prstGeom prst="rect">
+            <a:avLst/>
+          </a:prstGeom>
+          <a:noFill/>
+        </p:spPr>
+        <p:txBody>
+          <a:bodyPr wrap="square">
+            <a:spAutoFit/>
+          </a:bodyPr>
+          <a:lstStyle/>
+          <a:p>
+            <a:pPr algn="ctr"/>
+            <a:r>
+              <a:rPr sz="3900" b="1" i="0">
                 <a:solidFill>
                   <a:srgbClr val="FFFFFF"/>
                 </a:solidFill>
@@ -4393,99 +4113,29 @@
         </p:nvSpPr>
         <p:spPr>
           <a:xfrm>
-            <a:off x="594360" y="2980944"/>
-            <a:ext cx="11002975" cy="347472"/>
-          </a:xfrm>
-          <a:prstGeom prst="rect">
-            <a:avLst/>
-          </a:prstGeom>
-          <a:noFill/>
-        </p:spPr>
-        <p:txBody>
-          <a:bodyPr wrap="square">
-            <a:spAutoFit/>
-          </a:bodyPr>
-          <a:lstStyle/>
-          <a:p>
-            <a:pPr algn="ctr"/>
-            <a:r>
-              <a:rPr sz="2200" b="0" i="1">
-                <a:solidFill>
-                  <a:srgbClr val="8C8C8C"/>
-                </a:solidFill>
-                <a:latin typeface="Arial"/>
-              </a:rPr>
-              <a:t/>
-            </a:r>
-          </a:p>
-        </p:txBody>
-      </p:sp>
-      <p:sp>
-        <p:nvSpPr>
-          <p:cNvPr id="4" name="TextBox 3"/>
-          <p:cNvSpPr txBox="1"/>
-          <p:nvPr/>
-        </p:nvSpPr>
-        <p:spPr>
-          <a:xfrm>
-            <a:off x="594360" y="3529584"/>
-            <a:ext cx="11002975" cy="685800"/>
-          </a:xfrm>
-          <a:prstGeom prst="rect">
-            <a:avLst/>
-          </a:prstGeom>
-          <a:noFill/>
-        </p:spPr>
-        <p:txBody>
-          <a:bodyPr wrap="square">
-            <a:spAutoFit/>
-          </a:bodyPr>
-          <a:lstStyle/>
-          <a:p>
-            <a:pPr algn="ctr"/>
-            <a:r>
-              <a:rPr sz="4400" b="1" i="0">
+            <a:off x="640080" y="2985516"/>
+            <a:ext cx="10911535" cy="731520"/>
+          </a:xfrm>
+          <a:prstGeom prst="rect">
+            <a:avLst/>
+          </a:prstGeom>
+          <a:noFill/>
+        </p:spPr>
+        <p:txBody>
+          <a:bodyPr wrap="square">
+            <a:spAutoFit/>
+          </a:bodyPr>
+          <a:lstStyle/>
+          <a:p>
+            <a:pPr algn="ctr"/>
+            <a:r>
+              <a:rPr sz="4800" b="1" i="0">
                 <a:solidFill>
                   <a:srgbClr val="FFFFFF"/>
                 </a:solidFill>
                 <a:latin typeface="Arial"/>
               </a:rPr>
               <a:t>Com cada respiração</a:t>
-            </a:r>
-          </a:p>
-        </p:txBody>
-      </p:sp>
-      <p:sp>
-        <p:nvSpPr>
-          <p:cNvPr id="5" name="TextBox 4"/>
-          <p:cNvSpPr txBox="1"/>
-          <p:nvPr/>
-        </p:nvSpPr>
-        <p:spPr>
-          <a:xfrm>
-            <a:off x="594360" y="4251960"/>
-            <a:ext cx="11002975" cy="347472"/>
-          </a:xfrm>
-          <a:prstGeom prst="rect">
-            <a:avLst/>
-          </a:prstGeom>
-          <a:noFill/>
-        </p:spPr>
-        <p:txBody>
-          <a:bodyPr wrap="square">
-            <a:spAutoFit/>
-          </a:bodyPr>
-          <a:lstStyle/>
-          <a:p>
-            <a:pPr algn="ctr"/>
-            <a:r>
-              <a:rPr sz="2200" b="0" i="1">
-                <a:solidFill>
-                  <a:srgbClr val="8C8C8C"/>
-                </a:solidFill>
-                <a:latin typeface="Arial"/>
-              </a:rPr>
-              <a:t/>
             </a:r>
           </a:p>
         </p:txBody>
@@ -4524,23 +4174,23 @@
         </p:nvSpPr>
         <p:spPr>
           <a:xfrm>
-            <a:off x="594360" y="1837944"/>
-            <a:ext cx="11002975" cy="685800"/>
-          </a:xfrm>
-          <a:prstGeom prst="rect">
-            <a:avLst/>
-          </a:prstGeom>
-          <a:noFill/>
-        </p:spPr>
-        <p:txBody>
-          <a:bodyPr wrap="square">
-            <a:spAutoFit/>
-          </a:bodyPr>
-          <a:lstStyle/>
-          <a:p>
-            <a:pPr algn="ctr"/>
-            <a:r>
-              <a:rPr sz="4400" b="1" i="0">
+            <a:off x="640080" y="1650492"/>
+            <a:ext cx="10911535" cy="731520"/>
+          </a:xfrm>
+          <a:prstGeom prst="rect">
+            <a:avLst/>
+          </a:prstGeom>
+          <a:noFill/>
+        </p:spPr>
+        <p:txBody>
+          <a:bodyPr wrap="square">
+            <a:spAutoFit/>
+          </a:bodyPr>
+          <a:lstStyle/>
+          <a:p>
+            <a:pPr algn="ctr"/>
+            <a:r>
+              <a:rPr sz="4800" b="1" i="0">
                 <a:solidFill>
                   <a:srgbClr val="FFFFFF"/>
                 </a:solidFill>
@@ -4559,8 +4209,8 @@
         </p:nvSpPr>
         <p:spPr>
           <a:xfrm>
-            <a:off x="594360" y="2560320"/>
-            <a:ext cx="11002975" cy="384048"/>
+            <a:off x="640080" y="2418588"/>
+            <a:ext cx="10911535" cy="365760"/>
           </a:xfrm>
           <a:prstGeom prst="rect">
             <a:avLst/>
@@ -4577,7 +4227,7 @@
             <a:r>
               <a:rPr sz="2400" b="0" i="1">
                 <a:solidFill>
-                  <a:srgbClr val="B4B4B4"/>
+                  <a:srgbClr val="AAAAAA"/>
                 </a:solidFill>
                 <a:latin typeface="Arial"/>
               </a:rPr>
@@ -4594,8 +4244,78 @@
         </p:nvSpPr>
         <p:spPr>
           <a:xfrm>
-            <a:off x="594360" y="2980944"/>
-            <a:ext cx="11002975" cy="347472"/>
+            <a:off x="640080" y="2985516"/>
+            <a:ext cx="10911535" cy="731520"/>
+          </a:xfrm>
+          <a:prstGeom prst="rect">
+            <a:avLst/>
+          </a:prstGeom>
+          <a:noFill/>
+        </p:spPr>
+        <p:txBody>
+          <a:bodyPr wrap="square">
+            <a:spAutoFit/>
+          </a:bodyPr>
+          <a:lstStyle/>
+          <a:p>
+            <a:pPr algn="ctr"/>
+            <a:r>
+              <a:rPr sz="4800" b="1" i="0">
+                <a:solidFill>
+                  <a:srgbClr val="FFFFFF"/>
+                </a:solidFill>
+                <a:latin typeface="Arial"/>
+              </a:rPr>
+              <a:t>あなたの めぐみが　わたしを追う</a:t>
+            </a:r>
+          </a:p>
+        </p:txBody>
+      </p:sp>
+      <p:sp>
+        <p:nvSpPr>
+          <p:cNvPr id="5" name="TextBox 4"/>
+          <p:cNvSpPr txBox="1"/>
+          <p:nvPr/>
+        </p:nvSpPr>
+        <p:spPr>
+          <a:xfrm>
+            <a:off x="640080" y="3753612"/>
+            <a:ext cx="10911535" cy="365760"/>
+          </a:xfrm>
+          <a:prstGeom prst="rect">
+            <a:avLst/>
+          </a:prstGeom>
+          <a:noFill/>
+        </p:spPr>
+        <p:txBody>
+          <a:bodyPr wrap="square">
+            <a:spAutoFit/>
+          </a:bodyPr>
+          <a:lstStyle/>
+          <a:p>
+            <a:pPr algn="ctr"/>
+            <a:r>
+              <a:rPr sz="2400" b="0" i="1">
+                <a:solidFill>
+                  <a:srgbClr val="AAAAAA"/>
+                </a:solidFill>
+                <a:latin typeface="Arial"/>
+              </a:rPr>
+              <a:t>ana tano  megu miga wata shio ou</a:t>
+            </a:r>
+          </a:p>
+        </p:txBody>
+      </p:sp>
+      <p:sp>
+        <p:nvSpPr>
+          <p:cNvPr id="6" name="TextBox 5"/>
+          <p:cNvSpPr txBox="1"/>
+          <p:nvPr/>
+        </p:nvSpPr>
+        <p:spPr>
+          <a:xfrm>
+            <a:off x="640080" y="4530852"/>
+            <a:ext cx="10911535" cy="310896"/>
           </a:xfrm>
           <a:prstGeom prst="rect">
             <a:avLst/>
@@ -4612,7 +4332,7 @@
             <a:r>
               <a:rPr sz="2000" b="0" i="1">
                 <a:solidFill>
-                  <a:srgbClr val="8C8C8C"/>
+                  <a:srgbClr val="828282"/>
                 </a:solidFill>
                 <a:latin typeface="Arial"/>
               </a:rPr>
@@ -4623,84 +4343,14 @@
       </p:sp>
       <p:sp>
         <p:nvSpPr>
-          <p:cNvPr id="5" name="TextBox 4"/>
-          <p:cNvSpPr txBox="1"/>
-          <p:nvPr/>
-        </p:nvSpPr>
-        <p:spPr>
-          <a:xfrm>
-            <a:off x="594360" y="3529584"/>
-            <a:ext cx="11002975" cy="685800"/>
-          </a:xfrm>
-          <a:prstGeom prst="rect">
-            <a:avLst/>
-          </a:prstGeom>
-          <a:noFill/>
-        </p:spPr>
-        <p:txBody>
-          <a:bodyPr wrap="square">
-            <a:spAutoFit/>
-          </a:bodyPr>
-          <a:lstStyle/>
-          <a:p>
-            <a:pPr algn="ctr"/>
-            <a:r>
-              <a:rPr sz="4400" b="1" i="0">
-                <a:solidFill>
-                  <a:srgbClr val="FFFFFF"/>
-                </a:solidFill>
-                <a:latin typeface="Arial"/>
-              </a:rPr>
-              <a:t>あなたの めぐみが　わたしを追う</a:t>
-            </a:r>
-          </a:p>
-        </p:txBody>
-      </p:sp>
-      <p:sp>
-        <p:nvSpPr>
-          <p:cNvPr id="6" name="TextBox 5"/>
-          <p:cNvSpPr txBox="1"/>
-          <p:nvPr/>
-        </p:nvSpPr>
-        <p:spPr>
-          <a:xfrm>
-            <a:off x="594360" y="4251960"/>
-            <a:ext cx="11002975" cy="384048"/>
-          </a:xfrm>
-          <a:prstGeom prst="rect">
-            <a:avLst/>
-          </a:prstGeom>
-          <a:noFill/>
-        </p:spPr>
-        <p:txBody>
-          <a:bodyPr wrap="square">
-            <a:spAutoFit/>
-          </a:bodyPr>
-          <a:lstStyle/>
-          <a:p>
-            <a:pPr algn="ctr"/>
-            <a:r>
-              <a:rPr sz="2400" b="0" i="1">
-                <a:solidFill>
-                  <a:srgbClr val="B4B4B4"/>
-                </a:solidFill>
-                <a:latin typeface="Arial"/>
-              </a:rPr>
-              <a:t>ana tano  megu miga wata shio ou</a:t>
-            </a:r>
-          </a:p>
-        </p:txBody>
-      </p:sp>
-      <p:sp>
-        <p:nvSpPr>
           <p:cNvPr id="7" name="TextBox 6"/>
           <p:cNvSpPr txBox="1"/>
           <p:nvPr/>
         </p:nvSpPr>
         <p:spPr>
           <a:xfrm>
-            <a:off x="594360" y="4672584"/>
-            <a:ext cx="11002975" cy="347472"/>
+            <a:off x="640080" y="4896612"/>
+            <a:ext cx="10911535" cy="310896"/>
           </a:xfrm>
           <a:prstGeom prst="rect">
             <a:avLst/>
@@ -4717,7 +4367,7 @@
             <a:r>
               <a:rPr sz="2000" b="0" i="1">
                 <a:solidFill>
-                  <a:srgbClr val="8C8C8C"/>
+                  <a:srgbClr val="828282"/>
                 </a:solidFill>
                 <a:latin typeface="Arial"/>
               </a:rPr>
@@ -4760,23 +4410,23 @@
         </p:nvSpPr>
         <p:spPr>
           <a:xfrm>
-            <a:off x="594360" y="1837944"/>
-            <a:ext cx="11002975" cy="685800"/>
-          </a:xfrm>
-          <a:prstGeom prst="rect">
-            <a:avLst/>
-          </a:prstGeom>
-          <a:noFill/>
-        </p:spPr>
-        <p:txBody>
-          <a:bodyPr wrap="square">
-            <a:spAutoFit/>
-          </a:bodyPr>
-          <a:lstStyle/>
-          <a:p>
-            <a:pPr algn="ctr"/>
-            <a:r>
-              <a:rPr sz="4400" b="1" i="0">
+            <a:off x="640080" y="1650492"/>
+            <a:ext cx="10911535" cy="731520"/>
+          </a:xfrm>
+          <a:prstGeom prst="rect">
+            <a:avLst/>
+          </a:prstGeom>
+          <a:noFill/>
+        </p:spPr>
+        <p:txBody>
+          <a:bodyPr wrap="square">
+            <a:spAutoFit/>
+          </a:bodyPr>
+          <a:lstStyle/>
+          <a:p>
+            <a:pPr algn="ctr"/>
+            <a:r>
+              <a:rPr sz="4800" b="1" i="0">
                 <a:solidFill>
                   <a:srgbClr val="FFFFFF"/>
                 </a:solidFill>
@@ -4795,8 +4445,8 @@
         </p:nvSpPr>
         <p:spPr>
           <a:xfrm>
-            <a:off x="594360" y="2560320"/>
-            <a:ext cx="11002975" cy="384048"/>
+            <a:off x="640080" y="2418588"/>
+            <a:ext cx="10911535" cy="365760"/>
           </a:xfrm>
           <a:prstGeom prst="rect">
             <a:avLst/>
@@ -4813,7 +4463,7 @@
             <a:r>
               <a:rPr sz="2400" b="0" i="1">
                 <a:solidFill>
-                  <a:srgbClr val="B4B4B4"/>
+                  <a:srgbClr val="AAAAAA"/>
                 </a:solidFill>
                 <a:latin typeface="Arial"/>
               </a:rPr>
@@ -4830,8 +4480,78 @@
         </p:nvSpPr>
         <p:spPr>
           <a:xfrm>
-            <a:off x="594360" y="2980944"/>
-            <a:ext cx="11002975" cy="347472"/>
+            <a:off x="640080" y="2985516"/>
+            <a:ext cx="10911535" cy="731520"/>
+          </a:xfrm>
+          <a:prstGeom prst="rect">
+            <a:avLst/>
+          </a:prstGeom>
+          <a:noFill/>
+        </p:spPr>
+        <p:txBody>
+          <a:bodyPr wrap="square">
+            <a:spAutoFit/>
+          </a:bodyPr>
+          <a:lstStyle/>
+          <a:p>
+            <a:pPr algn="ctr"/>
+            <a:r>
+              <a:rPr sz="4800" b="1" i="0">
+                <a:solidFill>
+                  <a:srgbClr val="FFFFFF"/>
+                </a:solidFill>
+                <a:latin typeface="Arial"/>
+              </a:rPr>
+              <a:t>あなたの めぐみが　わたしを追う</a:t>
+            </a:r>
+          </a:p>
+        </p:txBody>
+      </p:sp>
+      <p:sp>
+        <p:nvSpPr>
+          <p:cNvPr id="5" name="TextBox 4"/>
+          <p:cNvSpPr txBox="1"/>
+          <p:nvPr/>
+        </p:nvSpPr>
+        <p:spPr>
+          <a:xfrm>
+            <a:off x="640080" y="3753612"/>
+            <a:ext cx="10911535" cy="365760"/>
+          </a:xfrm>
+          <a:prstGeom prst="rect">
+            <a:avLst/>
+          </a:prstGeom>
+          <a:noFill/>
+        </p:spPr>
+        <p:txBody>
+          <a:bodyPr wrap="square">
+            <a:spAutoFit/>
+          </a:bodyPr>
+          <a:lstStyle/>
+          <a:p>
+            <a:pPr algn="ctr"/>
+            <a:r>
+              <a:rPr sz="2400" b="0" i="1">
+                <a:solidFill>
+                  <a:srgbClr val="AAAAAA"/>
+                </a:solidFill>
+                <a:latin typeface="Arial"/>
+              </a:rPr>
+              <a:t>ana tano  megu miga wata shio ou</a:t>
+            </a:r>
+          </a:p>
+        </p:txBody>
+      </p:sp>
+      <p:sp>
+        <p:nvSpPr>
+          <p:cNvPr id="6" name="TextBox 5"/>
+          <p:cNvSpPr txBox="1"/>
+          <p:nvPr/>
+        </p:nvSpPr>
+        <p:spPr>
+          <a:xfrm>
+            <a:off x="640080" y="4530852"/>
+            <a:ext cx="10911535" cy="310896"/>
           </a:xfrm>
           <a:prstGeom prst="rect">
             <a:avLst/>
@@ -4848,7 +4568,7 @@
             <a:r>
               <a:rPr sz="2000" b="0" i="1">
                 <a:solidFill>
-                  <a:srgbClr val="8C8C8C"/>
+                  <a:srgbClr val="828282"/>
                 </a:solidFill>
                 <a:latin typeface="Arial"/>
               </a:rPr>
@@ -4859,84 +4579,14 @@
       </p:sp>
       <p:sp>
         <p:nvSpPr>
-          <p:cNvPr id="5" name="TextBox 4"/>
-          <p:cNvSpPr txBox="1"/>
-          <p:nvPr/>
-        </p:nvSpPr>
-        <p:spPr>
-          <a:xfrm>
-            <a:off x="594360" y="3529584"/>
-            <a:ext cx="11002975" cy="685800"/>
-          </a:xfrm>
-          <a:prstGeom prst="rect">
-            <a:avLst/>
-          </a:prstGeom>
-          <a:noFill/>
-        </p:spPr>
-        <p:txBody>
-          <a:bodyPr wrap="square">
-            <a:spAutoFit/>
-          </a:bodyPr>
-          <a:lstStyle/>
-          <a:p>
-            <a:pPr algn="ctr"/>
-            <a:r>
-              <a:rPr sz="4400" b="1" i="0">
-                <a:solidFill>
-                  <a:srgbClr val="FFFFFF"/>
-                </a:solidFill>
-                <a:latin typeface="Arial"/>
-              </a:rPr>
-              <a:t>あなたの めぐみが　わたしを追う</a:t>
-            </a:r>
-          </a:p>
-        </p:txBody>
-      </p:sp>
-      <p:sp>
-        <p:nvSpPr>
-          <p:cNvPr id="6" name="TextBox 5"/>
-          <p:cNvSpPr txBox="1"/>
-          <p:nvPr/>
-        </p:nvSpPr>
-        <p:spPr>
-          <a:xfrm>
-            <a:off x="594360" y="4251960"/>
-            <a:ext cx="11002975" cy="384048"/>
-          </a:xfrm>
-          <a:prstGeom prst="rect">
-            <a:avLst/>
-          </a:prstGeom>
-          <a:noFill/>
-        </p:spPr>
-        <p:txBody>
-          <a:bodyPr wrap="square">
-            <a:spAutoFit/>
-          </a:bodyPr>
-          <a:lstStyle/>
-          <a:p>
-            <a:pPr algn="ctr"/>
-            <a:r>
-              <a:rPr sz="2400" b="0" i="1">
-                <a:solidFill>
-                  <a:srgbClr val="B4B4B4"/>
-                </a:solidFill>
-                <a:latin typeface="Arial"/>
-              </a:rPr>
-              <a:t>ana tano  megu miga wata shio ou</a:t>
-            </a:r>
-          </a:p>
-        </p:txBody>
-      </p:sp>
-      <p:sp>
-        <p:nvSpPr>
           <p:cNvPr id="7" name="TextBox 6"/>
           <p:cNvSpPr txBox="1"/>
           <p:nvPr/>
         </p:nvSpPr>
         <p:spPr>
           <a:xfrm>
-            <a:off x="594360" y="4672584"/>
-            <a:ext cx="11002975" cy="347472"/>
+            <a:off x="640080" y="4896612"/>
+            <a:ext cx="10911535" cy="310896"/>
           </a:xfrm>
           <a:prstGeom prst="rect">
             <a:avLst/>
@@ -4953,7 +4603,7 @@
             <a:r>
               <a:rPr sz="2000" b="0" i="1">
                 <a:solidFill>
-                  <a:srgbClr val="8C8C8C"/>
+                  <a:srgbClr val="828282"/>
                 </a:solidFill>
                 <a:latin typeface="Arial"/>
               </a:rPr>
@@ -4996,23 +4646,23 @@
         </p:nvSpPr>
         <p:spPr>
           <a:xfrm>
-            <a:off x="594360" y="2258568"/>
-            <a:ext cx="11002975" cy="685800"/>
-          </a:xfrm>
-          <a:prstGeom prst="rect">
-            <a:avLst/>
-          </a:prstGeom>
-          <a:noFill/>
-        </p:spPr>
-        <p:txBody>
-          <a:bodyPr wrap="square">
-            <a:spAutoFit/>
-          </a:bodyPr>
-          <a:lstStyle/>
-          <a:p>
-            <a:pPr algn="ctr"/>
-            <a:r>
-              <a:rPr sz="4400" b="1" i="0">
+            <a:off x="640080" y="2052828"/>
+            <a:ext cx="10911535" cy="731520"/>
+          </a:xfrm>
+          <a:prstGeom prst="rect">
+            <a:avLst/>
+          </a:prstGeom>
+          <a:noFill/>
+        </p:spPr>
+        <p:txBody>
+          <a:bodyPr wrap="square">
+            <a:spAutoFit/>
+          </a:bodyPr>
+          <a:lstStyle/>
+          <a:p>
+            <a:pPr algn="ctr"/>
+            <a:r>
+              <a:rPr sz="4800" b="1" i="0">
                 <a:solidFill>
                   <a:srgbClr val="FFFFFF"/>
                 </a:solidFill>
@@ -5031,25 +4681,60 @@
         </p:nvSpPr>
         <p:spPr>
           <a:xfrm>
-            <a:off x="594360" y="2980944"/>
-            <a:ext cx="11002975" cy="347472"/>
-          </a:xfrm>
-          <a:prstGeom prst="rect">
-            <a:avLst/>
-          </a:prstGeom>
-          <a:noFill/>
-        </p:spPr>
-        <p:txBody>
-          <a:bodyPr wrap="square">
-            <a:spAutoFit/>
-          </a:bodyPr>
-          <a:lstStyle/>
-          <a:p>
-            <a:pPr algn="ctr"/>
-            <a:r>
-              <a:rPr sz="2200" b="0" i="1">
-                <a:solidFill>
-                  <a:srgbClr val="8C8C8C"/>
+            <a:off x="640080" y="2985516"/>
+            <a:ext cx="10911535" cy="731520"/>
+          </a:xfrm>
+          <a:prstGeom prst="rect">
+            <a:avLst/>
+          </a:prstGeom>
+          <a:noFill/>
+        </p:spPr>
+        <p:txBody>
+          <a:bodyPr wrap="square">
+            <a:spAutoFit/>
+          </a:bodyPr>
+          <a:lstStyle/>
+          <a:p>
+            <a:pPr algn="ctr"/>
+            <a:r>
+              <a:rPr sz="4300" b="1" i="0">
+                <a:solidFill>
+                  <a:srgbClr val="FFFFFF"/>
+                </a:solidFill>
+                <a:latin typeface="Arial"/>
+              </a:rPr>
+              <a:t>Ai eu vou cantar da bondade de Deus</a:t>
+            </a:r>
+          </a:p>
+        </p:txBody>
+      </p:sp>
+      <p:sp>
+        <p:nvSpPr>
+          <p:cNvPr id="4" name="TextBox 3"/>
+          <p:cNvSpPr txBox="1"/>
+          <p:nvPr/>
+        </p:nvSpPr>
+        <p:spPr>
+          <a:xfrm>
+            <a:off x="640080" y="4128516"/>
+            <a:ext cx="10911535" cy="310896"/>
+          </a:xfrm>
+          <a:prstGeom prst="rect">
+            <a:avLst/>
+          </a:prstGeom>
+          <a:noFill/>
+        </p:spPr>
+        <p:txBody>
+          <a:bodyPr wrap="square">
+            <a:spAutoFit/>
+          </a:bodyPr>
+          <a:lstStyle/>
+          <a:p>
+            <a:pPr algn="ctr"/>
+            <a:r>
+              <a:rPr sz="2000" b="0" i="0">
+                <a:solidFill>
+                  <a:srgbClr val="828282"/>
                 </a:solidFill>
                 <a:latin typeface="Arial"/>
               </a:rPr>
@@ -5060,66 +4745,31 @@
       </p:sp>
       <p:sp>
         <p:nvSpPr>
-          <p:cNvPr id="4" name="TextBox 3"/>
-          <p:cNvSpPr txBox="1"/>
-          <p:nvPr/>
-        </p:nvSpPr>
-        <p:spPr>
-          <a:xfrm>
-            <a:off x="594360" y="3529584"/>
-            <a:ext cx="11002975" cy="685800"/>
-          </a:xfrm>
-          <a:prstGeom prst="rect">
-            <a:avLst/>
-          </a:prstGeom>
-          <a:noFill/>
-        </p:spPr>
-        <p:txBody>
-          <a:bodyPr wrap="square">
-            <a:spAutoFit/>
-          </a:bodyPr>
-          <a:lstStyle/>
-          <a:p>
-            <a:pPr algn="ctr"/>
-            <a:r>
-              <a:rPr sz="4022" b="1" i="0">
-                <a:solidFill>
-                  <a:srgbClr val="FFFFFF"/>
-                </a:solidFill>
-                <a:latin typeface="Arial"/>
-              </a:rPr>
-              <a:t>Ai eu vou cantar da bondade de Deus</a:t>
-            </a:r>
-          </a:p>
-        </p:txBody>
-      </p:sp>
-      <p:sp>
-        <p:nvSpPr>
           <p:cNvPr id="5" name="TextBox 4"/>
           <p:cNvSpPr txBox="1"/>
           <p:nvPr/>
         </p:nvSpPr>
         <p:spPr>
           <a:xfrm>
-            <a:off x="594360" y="4251960"/>
-            <a:ext cx="11002975" cy="347472"/>
-          </a:xfrm>
-          <a:prstGeom prst="rect">
-            <a:avLst/>
-          </a:prstGeom>
-          <a:noFill/>
-        </p:spPr>
-        <p:txBody>
-          <a:bodyPr wrap="square">
-            <a:spAutoFit/>
-          </a:bodyPr>
-          <a:lstStyle/>
-          <a:p>
-            <a:pPr algn="ctr"/>
-            <a:r>
-              <a:rPr sz="2200" b="0" i="1">
-                <a:solidFill>
-                  <a:srgbClr val="8C8C8C"/>
+            <a:off x="640080" y="4494276"/>
+            <a:ext cx="10911535" cy="310896"/>
+          </a:xfrm>
+          <a:prstGeom prst="rect">
+            <a:avLst/>
+          </a:prstGeom>
+          <a:noFill/>
+        </p:spPr>
+        <p:txBody>
+          <a:bodyPr wrap="square">
+            <a:spAutoFit/>
+          </a:bodyPr>
+          <a:lstStyle/>
+          <a:p>
+            <a:pPr algn="ctr"/>
+            <a:r>
+              <a:rPr sz="2000" b="0" i="0">
+                <a:solidFill>
+                  <a:srgbClr val="828282"/>
                 </a:solidFill>
                 <a:latin typeface="Arial"/>
               </a:rPr>
@@ -5162,23 +4812,23 @@
         </p:nvSpPr>
         <p:spPr>
           <a:xfrm>
-            <a:off x="594360" y="1837944"/>
-            <a:ext cx="11002975" cy="685800"/>
-          </a:xfrm>
-          <a:prstGeom prst="rect">
-            <a:avLst/>
-          </a:prstGeom>
-          <a:noFill/>
-        </p:spPr>
-        <p:txBody>
-          <a:bodyPr wrap="square">
-            <a:spAutoFit/>
-          </a:bodyPr>
-          <a:lstStyle/>
-          <a:p>
-            <a:pPr algn="ctr"/>
-            <a:r>
-              <a:rPr sz="4400" b="1" i="0">
+            <a:off x="640080" y="1650492"/>
+            <a:ext cx="10911535" cy="731520"/>
+          </a:xfrm>
+          <a:prstGeom prst="rect">
+            <a:avLst/>
+          </a:prstGeom>
+          <a:noFill/>
+        </p:spPr>
+        <p:txBody>
+          <a:bodyPr wrap="square">
+            <a:spAutoFit/>
+          </a:bodyPr>
+          <a:lstStyle/>
+          <a:p>
+            <a:pPr algn="ctr"/>
+            <a:r>
+              <a:rPr sz="4800" b="1" i="0">
                 <a:solidFill>
                   <a:srgbClr val="FFFFFF"/>
                 </a:solidFill>
@@ -5197,8 +4847,8 @@
         </p:nvSpPr>
         <p:spPr>
           <a:xfrm>
-            <a:off x="594360" y="2560320"/>
-            <a:ext cx="11002975" cy="384048"/>
+            <a:off x="640080" y="2418588"/>
+            <a:ext cx="10911535" cy="365760"/>
           </a:xfrm>
           <a:prstGeom prst="rect">
             <a:avLst/>
@@ -5215,7 +4865,7 @@
             <a:r>
               <a:rPr sz="2400" b="0" i="1">
                 <a:solidFill>
-                  <a:srgbClr val="B4B4B4"/>
+                  <a:srgbClr val="AAAAAA"/>
                 </a:solidFill>
                 <a:latin typeface="Arial"/>
               </a:rPr>
@@ -5232,8 +4882,78 @@
         </p:nvSpPr>
         <p:spPr>
           <a:xfrm>
-            <a:off x="594360" y="2980944"/>
-            <a:ext cx="11002975" cy="347472"/>
+            <a:off x="640080" y="2985516"/>
+            <a:ext cx="10911535" cy="731520"/>
+          </a:xfrm>
+          <a:prstGeom prst="rect">
+            <a:avLst/>
+          </a:prstGeom>
+          <a:noFill/>
+        </p:spPr>
+        <p:txBody>
+          <a:bodyPr wrap="square">
+            <a:spAutoFit/>
+          </a:bodyPr>
+          <a:lstStyle/>
+          <a:p>
+            <a:pPr algn="ctr"/>
+            <a:r>
+              <a:rPr sz="4800" b="1" i="0">
+                <a:solidFill>
+                  <a:srgbClr val="FFFFFF"/>
+                </a:solidFill>
+                <a:latin typeface="Arial"/>
+              </a:rPr>
+              <a:t>歌おう 神の   めぐみを</a:t>
+            </a:r>
+          </a:p>
+        </p:txBody>
+      </p:sp>
+      <p:sp>
+        <p:nvSpPr>
+          <p:cNvPr id="5" name="TextBox 4"/>
+          <p:cNvSpPr txBox="1"/>
+          <p:nvPr/>
+        </p:nvSpPr>
+        <p:spPr>
+          <a:xfrm>
+            <a:off x="640080" y="3753612"/>
+            <a:ext cx="10911535" cy="365760"/>
+          </a:xfrm>
+          <a:prstGeom prst="rect">
+            <a:avLst/>
+          </a:prstGeom>
+          <a:noFill/>
+        </p:spPr>
+        <p:txBody>
+          <a:bodyPr wrap="square">
+            <a:spAutoFit/>
+          </a:bodyPr>
+          <a:lstStyle/>
+          <a:p>
+            <a:pPr algn="ctr"/>
+            <a:r>
+              <a:rPr sz="2400" b="0" i="1">
+                <a:solidFill>
+                  <a:srgbClr val="AAAAAA"/>
+                </a:solidFill>
+                <a:latin typeface="Arial"/>
+              </a:rPr>
+              <a:t>utaou  kamino megumio</a:t>
+            </a:r>
+          </a:p>
+        </p:txBody>
+      </p:sp>
+      <p:sp>
+        <p:nvSpPr>
+          <p:cNvPr id="6" name="TextBox 5"/>
+          <p:cNvSpPr txBox="1"/>
+          <p:nvPr/>
+        </p:nvSpPr>
+        <p:spPr>
+          <a:xfrm>
+            <a:off x="640080" y="4530852"/>
+            <a:ext cx="10911535" cy="310896"/>
           </a:xfrm>
           <a:prstGeom prst="rect">
             <a:avLst/>
@@ -5250,81 +4970,11 @@
             <a:r>
               <a:rPr sz="2000" b="0" i="1">
                 <a:solidFill>
-                  <a:srgbClr val="8C8C8C"/>
-                </a:solidFill>
-                <a:latin typeface="Arial"/>
-              </a:rPr>
-              <a:t/>
-            </a:r>
-          </a:p>
-        </p:txBody>
-      </p:sp>
-      <p:sp>
-        <p:nvSpPr>
-          <p:cNvPr id="5" name="TextBox 4"/>
-          <p:cNvSpPr txBox="1"/>
-          <p:nvPr/>
-        </p:nvSpPr>
-        <p:spPr>
-          <a:xfrm>
-            <a:off x="594360" y="3529584"/>
-            <a:ext cx="11002975" cy="685800"/>
-          </a:xfrm>
-          <a:prstGeom prst="rect">
-            <a:avLst/>
-          </a:prstGeom>
-          <a:noFill/>
-        </p:spPr>
-        <p:txBody>
-          <a:bodyPr wrap="square">
-            <a:spAutoFit/>
-          </a:bodyPr>
-          <a:lstStyle/>
-          <a:p>
-            <a:pPr algn="ctr"/>
-            <a:r>
-              <a:rPr sz="4400" b="1" i="0">
-                <a:solidFill>
-                  <a:srgbClr val="FFFFFF"/>
-                </a:solidFill>
-                <a:latin typeface="Arial"/>
-              </a:rPr>
-              <a:t>歌おう 神の   めぐみを</a:t>
-            </a:r>
-          </a:p>
-        </p:txBody>
-      </p:sp>
-      <p:sp>
-        <p:nvSpPr>
-          <p:cNvPr id="6" name="TextBox 5"/>
-          <p:cNvSpPr txBox="1"/>
-          <p:nvPr/>
-        </p:nvSpPr>
-        <p:spPr>
-          <a:xfrm>
-            <a:off x="594360" y="4251960"/>
-            <a:ext cx="11002975" cy="384048"/>
-          </a:xfrm>
-          <a:prstGeom prst="rect">
-            <a:avLst/>
-          </a:prstGeom>
-          <a:noFill/>
-        </p:spPr>
-        <p:txBody>
-          <a:bodyPr wrap="square">
-            <a:spAutoFit/>
-          </a:bodyPr>
-          <a:lstStyle/>
-          <a:p>
-            <a:pPr algn="ctr"/>
-            <a:r>
-              <a:rPr sz="2400" b="0" i="1">
-                <a:solidFill>
-                  <a:srgbClr val="B4B4B4"/>
-                </a:solidFill>
-                <a:latin typeface="Arial"/>
-              </a:rPr>
-              <a:t>utaou  kamino megumio</a:t>
+                  <a:srgbClr val="828282"/>
+                </a:solidFill>
+                <a:latin typeface="Arial"/>
+              </a:rPr>
+              <a:t>Pois sua misericórdia nunca me falha</a:t>
             </a:r>
           </a:p>
         </p:txBody>
@@ -5337,8 +4987,8 @@
         </p:nvSpPr>
         <p:spPr>
           <a:xfrm>
-            <a:off x="594360" y="4672584"/>
-            <a:ext cx="11002975" cy="347472"/>
+            <a:off x="640080" y="4896612"/>
+            <a:ext cx="10911535" cy="310896"/>
           </a:xfrm>
           <a:prstGeom prst="rect">
             <a:avLst/>
@@ -5355,11 +5005,11 @@
             <a:r>
               <a:rPr sz="2000" b="0" i="1">
                 <a:solidFill>
-                  <a:srgbClr val="8C8C8C"/>
-                </a:solidFill>
-                <a:latin typeface="Arial"/>
-              </a:rPr>
-              <a:t/>
+                  <a:srgbClr val="828282"/>
+                </a:solidFill>
+                <a:latin typeface="Arial"/>
+              </a:rPr>
+              <a:t>Todos os meus dias</a:t>
             </a:r>
           </a:p>
         </p:txBody>
@@ -5398,23 +5048,23 @@
         </p:nvSpPr>
         <p:spPr>
           <a:xfrm>
-            <a:off x="594360" y="2258568"/>
-            <a:ext cx="11002975" cy="685800"/>
-          </a:xfrm>
-          <a:prstGeom prst="rect">
-            <a:avLst/>
-          </a:prstGeom>
-          <a:noFill/>
-        </p:spPr>
-        <p:txBody>
-          <a:bodyPr wrap="square">
-            <a:spAutoFit/>
-          </a:bodyPr>
-          <a:lstStyle/>
-          <a:p>
-            <a:pPr algn="ctr"/>
-            <a:r>
-              <a:rPr sz="4400" b="1" i="0">
+            <a:off x="640080" y="2052828"/>
+            <a:ext cx="10911535" cy="731520"/>
+          </a:xfrm>
+          <a:prstGeom prst="rect">
+            <a:avLst/>
+          </a:prstGeom>
+          <a:noFill/>
+        </p:spPr>
+        <p:txBody>
+          <a:bodyPr wrap="square">
+            <a:spAutoFit/>
+          </a:bodyPr>
+          <a:lstStyle/>
+          <a:p>
+            <a:pPr algn="ctr"/>
+            <a:r>
+              <a:rPr sz="4800" b="1" i="0">
                 <a:solidFill>
                   <a:srgbClr val="FFFFFF"/>
                 </a:solidFill>
@@ -5433,25 +5083,60 @@
         </p:nvSpPr>
         <p:spPr>
           <a:xfrm>
-            <a:off x="594360" y="2980944"/>
-            <a:ext cx="11002975" cy="347472"/>
-          </a:xfrm>
-          <a:prstGeom prst="rect">
-            <a:avLst/>
-          </a:prstGeom>
-          <a:noFill/>
-        </p:spPr>
-        <p:txBody>
-          <a:bodyPr wrap="square">
-            <a:spAutoFit/>
-          </a:bodyPr>
-          <a:lstStyle/>
-          <a:p>
-            <a:pPr algn="ctr"/>
-            <a:r>
-              <a:rPr sz="2200" b="0" i="1">
-                <a:solidFill>
-                  <a:srgbClr val="8C8C8C"/>
+            <a:off x="640080" y="2985516"/>
+            <a:ext cx="10911535" cy="731520"/>
+          </a:xfrm>
+          <a:prstGeom prst="rect">
+            <a:avLst/>
+          </a:prstGeom>
+          <a:noFill/>
+        </p:spPr>
+        <p:txBody>
+          <a:bodyPr wrap="square">
+            <a:spAutoFit/>
+          </a:bodyPr>
+          <a:lstStyle/>
+          <a:p>
+            <a:pPr algn="ctr"/>
+            <a:r>
+              <a:rPr sz="4800" b="1" i="0">
+                <a:solidFill>
+                  <a:srgbClr val="FFFFFF"/>
+                </a:solidFill>
+                <a:latin typeface="Arial"/>
+              </a:rPr>
+              <a:t>Você me levou através do fogo</a:t>
+            </a:r>
+          </a:p>
+        </p:txBody>
+      </p:sp>
+      <p:sp>
+        <p:nvSpPr>
+          <p:cNvPr id="4" name="TextBox 3"/>
+          <p:cNvSpPr txBox="1"/>
+          <p:nvPr/>
+        </p:nvSpPr>
+        <p:spPr>
+          <a:xfrm>
+            <a:off x="640080" y="4128516"/>
+            <a:ext cx="10911535" cy="310896"/>
+          </a:xfrm>
+          <a:prstGeom prst="rect">
+            <a:avLst/>
+          </a:prstGeom>
+          <a:noFill/>
+        </p:spPr>
+        <p:txBody>
+          <a:bodyPr wrap="square">
+            <a:spAutoFit/>
+          </a:bodyPr>
+          <a:lstStyle/>
+          <a:p>
+            <a:pPr algn="ctr"/>
+            <a:r>
+              <a:rPr sz="2000" b="0" i="0">
+                <a:solidFill>
+                  <a:srgbClr val="828282"/>
                 </a:solidFill>
                 <a:latin typeface="Arial"/>
               </a:rPr>
@@ -5462,66 +5147,31 @@
       </p:sp>
       <p:sp>
         <p:nvSpPr>
-          <p:cNvPr id="4" name="TextBox 3"/>
-          <p:cNvSpPr txBox="1"/>
-          <p:nvPr/>
-        </p:nvSpPr>
-        <p:spPr>
-          <a:xfrm>
-            <a:off x="594360" y="3529584"/>
-            <a:ext cx="11002975" cy="685800"/>
-          </a:xfrm>
-          <a:prstGeom prst="rect">
-            <a:avLst/>
-          </a:prstGeom>
-          <a:noFill/>
-        </p:spPr>
-        <p:txBody>
-          <a:bodyPr wrap="square">
-            <a:spAutoFit/>
-          </a:bodyPr>
-          <a:lstStyle/>
-          <a:p>
-            <a:pPr algn="ctr"/>
-            <a:r>
-              <a:rPr sz="4400" b="1" i="0">
-                <a:solidFill>
-                  <a:srgbClr val="FFFFFF"/>
-                </a:solidFill>
-                <a:latin typeface="Arial"/>
-              </a:rPr>
-              <a:t>Você me levou através do fogo</a:t>
-            </a:r>
-          </a:p>
-        </p:txBody>
-      </p:sp>
-      <p:sp>
-        <p:nvSpPr>
           <p:cNvPr id="5" name="TextBox 4"/>
           <p:cNvSpPr txBox="1"/>
           <p:nvPr/>
         </p:nvSpPr>
         <p:spPr>
           <a:xfrm>
-            <a:off x="594360" y="4251960"/>
-            <a:ext cx="11002975" cy="347472"/>
-          </a:xfrm>
-          <a:prstGeom prst="rect">
-            <a:avLst/>
-          </a:prstGeom>
-          <a:noFill/>
-        </p:spPr>
-        <p:txBody>
-          <a:bodyPr wrap="square">
-            <a:spAutoFit/>
-          </a:bodyPr>
-          <a:lstStyle/>
-          <a:p>
-            <a:pPr algn="ctr"/>
-            <a:r>
-              <a:rPr sz="2200" b="0" i="1">
-                <a:solidFill>
-                  <a:srgbClr val="8C8C8C"/>
+            <a:off x="640080" y="4494276"/>
+            <a:ext cx="10911535" cy="310896"/>
+          </a:xfrm>
+          <a:prstGeom prst="rect">
+            <a:avLst/>
+          </a:prstGeom>
+          <a:noFill/>
+        </p:spPr>
+        <p:txBody>
+          <a:bodyPr wrap="square">
+            <a:spAutoFit/>
+          </a:bodyPr>
+          <a:lstStyle/>
+          <a:p>
+            <a:pPr algn="ctr"/>
+            <a:r>
+              <a:rPr sz="2000" b="0" i="0">
+                <a:solidFill>
+                  <a:srgbClr val="828282"/>
                 </a:solidFill>
                 <a:latin typeface="Arial"/>
               </a:rPr>
@@ -5564,23 +5214,23 @@
         </p:nvSpPr>
         <p:spPr>
           <a:xfrm>
-            <a:off x="594360" y="2258568"/>
-            <a:ext cx="11002975" cy="685800"/>
-          </a:xfrm>
-          <a:prstGeom prst="rect">
-            <a:avLst/>
-          </a:prstGeom>
-          <a:noFill/>
-        </p:spPr>
-        <p:txBody>
-          <a:bodyPr wrap="square">
-            <a:spAutoFit/>
-          </a:bodyPr>
-          <a:lstStyle/>
-          <a:p>
-            <a:pPr algn="ctr"/>
-            <a:r>
-              <a:rPr sz="4400" b="1" i="0">
+            <a:off x="640080" y="2052828"/>
+            <a:ext cx="10911535" cy="731520"/>
+          </a:xfrm>
+          <a:prstGeom prst="rect">
+            <a:avLst/>
+          </a:prstGeom>
+          <a:noFill/>
+        </p:spPr>
+        <p:txBody>
+          <a:bodyPr wrap="square">
+            <a:spAutoFit/>
+          </a:bodyPr>
+          <a:lstStyle/>
+          <a:p>
+            <a:pPr algn="ctr"/>
+            <a:r>
+              <a:rPr sz="4800" b="1" i="0">
                 <a:solidFill>
                   <a:srgbClr val="FFFFFF"/>
                 </a:solidFill>
@@ -5599,99 +5249,29 @@
         </p:nvSpPr>
         <p:spPr>
           <a:xfrm>
-            <a:off x="594360" y="2980944"/>
-            <a:ext cx="11002975" cy="347472"/>
-          </a:xfrm>
-          <a:prstGeom prst="rect">
-            <a:avLst/>
-          </a:prstGeom>
-          <a:noFill/>
-        </p:spPr>
-        <p:txBody>
-          <a:bodyPr wrap="square">
-            <a:spAutoFit/>
-          </a:bodyPr>
-          <a:lstStyle/>
-          <a:p>
-            <a:pPr algn="ctr"/>
-            <a:r>
-              <a:rPr sz="2200" b="0" i="1">
-                <a:solidFill>
-                  <a:srgbClr val="8C8C8C"/>
-                </a:solidFill>
-                <a:latin typeface="Arial"/>
-              </a:rPr>
-              <a:t/>
-            </a:r>
-          </a:p>
-        </p:txBody>
-      </p:sp>
-      <p:sp>
-        <p:nvSpPr>
-          <p:cNvPr id="4" name="TextBox 3"/>
-          <p:cNvSpPr txBox="1"/>
-          <p:nvPr/>
-        </p:nvSpPr>
-        <p:spPr>
-          <a:xfrm>
-            <a:off x="594360" y="3529584"/>
-            <a:ext cx="11002975" cy="685800"/>
-          </a:xfrm>
-          <a:prstGeom prst="rect">
-            <a:avLst/>
-          </a:prstGeom>
-          <a:noFill/>
-        </p:spPr>
-        <p:txBody>
-          <a:bodyPr wrap="square">
-            <a:spAutoFit/>
-          </a:bodyPr>
-          <a:lstStyle/>
-          <a:p>
-            <a:pPr algn="ctr"/>
-            <a:r>
-              <a:rPr sz="4400" b="1" i="0">
+            <a:off x="640080" y="2985516"/>
+            <a:ext cx="10911535" cy="731520"/>
+          </a:xfrm>
+          <a:prstGeom prst="rect">
+            <a:avLst/>
+          </a:prstGeom>
+          <a:noFill/>
+        </p:spPr>
+        <p:txBody>
+          <a:bodyPr wrap="square">
+            <a:spAutoFit/>
+          </a:bodyPr>
+          <a:lstStyle/>
+          <a:p>
+            <a:pPr algn="ctr"/>
+            <a:r>
+              <a:rPr sz="4800" b="1" i="0">
                 <a:solidFill>
                   <a:srgbClr val="FFFFFF"/>
                 </a:solidFill>
                 <a:latin typeface="Arial"/>
               </a:rPr>
               <a:t>Estou rendido agora</a:t>
-            </a:r>
-          </a:p>
-        </p:txBody>
-      </p:sp>
-      <p:sp>
-        <p:nvSpPr>
-          <p:cNvPr id="5" name="TextBox 4"/>
-          <p:cNvSpPr txBox="1"/>
-          <p:nvPr/>
-        </p:nvSpPr>
-        <p:spPr>
-          <a:xfrm>
-            <a:off x="594360" y="4251960"/>
-            <a:ext cx="11002975" cy="347472"/>
-          </a:xfrm>
-          <a:prstGeom prst="rect">
-            <a:avLst/>
-          </a:prstGeom>
-          <a:noFill/>
-        </p:spPr>
-        <p:txBody>
-          <a:bodyPr wrap="square">
-            <a:spAutoFit/>
-          </a:bodyPr>
-          <a:lstStyle/>
-          <a:p>
-            <a:pPr algn="ctr"/>
-            <a:r>
-              <a:rPr sz="2200" b="0" i="1">
-                <a:solidFill>
-                  <a:srgbClr val="8C8C8C"/>
-                </a:solidFill>
-                <a:latin typeface="Arial"/>
-              </a:rPr>
-              <a:t/>
             </a:r>
           </a:p>
         </p:txBody>
@@ -5730,23 +5310,23 @@
         </p:nvSpPr>
         <p:spPr>
           <a:xfrm>
-            <a:off x="594360" y="2258568"/>
-            <a:ext cx="11002975" cy="685800"/>
-          </a:xfrm>
-          <a:prstGeom prst="rect">
-            <a:avLst/>
-          </a:prstGeom>
-          <a:noFill/>
-        </p:spPr>
-        <p:txBody>
-          <a:bodyPr wrap="square">
-            <a:spAutoFit/>
-          </a:bodyPr>
-          <a:lstStyle/>
-          <a:p>
-            <a:pPr algn="ctr"/>
-            <a:r>
-              <a:rPr sz="4400" b="1" i="0">
+            <a:off x="640080" y="2052828"/>
+            <a:ext cx="10911535" cy="731520"/>
+          </a:xfrm>
+          <a:prstGeom prst="rect">
+            <a:avLst/>
+          </a:prstGeom>
+          <a:noFill/>
+        </p:spPr>
+        <p:txBody>
+          <a:bodyPr wrap="square">
+            <a:spAutoFit/>
+          </a:bodyPr>
+          <a:lstStyle/>
+          <a:p>
+            <a:pPr algn="ctr"/>
+            <a:r>
+              <a:rPr sz="4800" b="1" i="0">
                 <a:solidFill>
                   <a:srgbClr val="FFFFFF"/>
                 </a:solidFill>
@@ -5765,99 +5345,29 @@
         </p:nvSpPr>
         <p:spPr>
           <a:xfrm>
-            <a:off x="594360" y="2980944"/>
-            <a:ext cx="11002975" cy="347472"/>
-          </a:xfrm>
-          <a:prstGeom prst="rect">
-            <a:avLst/>
-          </a:prstGeom>
-          <a:noFill/>
-        </p:spPr>
-        <p:txBody>
-          <a:bodyPr wrap="square">
-            <a:spAutoFit/>
-          </a:bodyPr>
-          <a:lstStyle/>
-          <a:p>
-            <a:pPr algn="ctr"/>
-            <a:r>
-              <a:rPr sz="2200" b="0" i="1">
-                <a:solidFill>
-                  <a:srgbClr val="8C8C8C"/>
-                </a:solidFill>
-                <a:latin typeface="Arial"/>
-              </a:rPr>
-              <a:t/>
-            </a:r>
-          </a:p>
-        </p:txBody>
-      </p:sp>
-      <p:sp>
-        <p:nvSpPr>
-          <p:cNvPr id="4" name="TextBox 3"/>
-          <p:cNvSpPr txBox="1"/>
-          <p:nvPr/>
-        </p:nvSpPr>
-        <p:spPr>
-          <a:xfrm>
-            <a:off x="594360" y="3529584"/>
-            <a:ext cx="11002975" cy="685800"/>
-          </a:xfrm>
-          <a:prstGeom prst="rect">
-            <a:avLst/>
-          </a:prstGeom>
-          <a:noFill/>
-        </p:spPr>
-        <p:txBody>
-          <a:bodyPr wrap="square">
-            <a:spAutoFit/>
-          </a:bodyPr>
-          <a:lstStyle/>
-          <a:p>
-            <a:pPr algn="ctr"/>
-            <a:r>
-              <a:rPr sz="4400" b="1" i="0">
+            <a:off x="640080" y="2985516"/>
+            <a:ext cx="10911535" cy="731520"/>
+          </a:xfrm>
+          <a:prstGeom prst="rect">
+            <a:avLst/>
+          </a:prstGeom>
+          <a:noFill/>
+        </p:spPr>
+        <p:txBody>
+          <a:bodyPr wrap="square">
+            <a:spAutoFit/>
+          </a:bodyPr>
+          <a:lstStyle/>
+          <a:p>
+            <a:pPr algn="ctr"/>
+            <a:r>
+              <a:rPr sz="4800" b="1" i="0">
                 <a:solidFill>
                   <a:srgbClr val="FFFFFF"/>
                 </a:solidFill>
                 <a:latin typeface="Arial"/>
               </a:rPr>
               <a:t>Com minha vida colocada</a:t>
-            </a:r>
-          </a:p>
-        </p:txBody>
-      </p:sp>
-      <p:sp>
-        <p:nvSpPr>
-          <p:cNvPr id="5" name="TextBox 4"/>
-          <p:cNvSpPr txBox="1"/>
-          <p:nvPr/>
-        </p:nvSpPr>
-        <p:spPr>
-          <a:xfrm>
-            <a:off x="594360" y="4251960"/>
-            <a:ext cx="11002975" cy="347472"/>
-          </a:xfrm>
-          <a:prstGeom prst="rect">
-            <a:avLst/>
-          </a:prstGeom>
-          <a:noFill/>
-        </p:spPr>
-        <p:txBody>
-          <a:bodyPr wrap="square">
-            <a:spAutoFit/>
-          </a:bodyPr>
-          <a:lstStyle/>
-          <a:p>
-            <a:pPr algn="ctr"/>
-            <a:r>
-              <a:rPr sz="2200" b="0" i="1">
-                <a:solidFill>
-                  <a:srgbClr val="8C8C8C"/>
-                </a:solidFill>
-                <a:latin typeface="Arial"/>
-              </a:rPr>
-              <a:t/>
             </a:r>
           </a:p>
         </p:txBody>
@@ -5896,23 +5406,23 @@
         </p:nvSpPr>
         <p:spPr>
           <a:xfrm>
-            <a:off x="594360" y="2258568"/>
-            <a:ext cx="11002975" cy="685800"/>
-          </a:xfrm>
-          <a:prstGeom prst="rect">
-            <a:avLst/>
-          </a:prstGeom>
-          <a:noFill/>
-        </p:spPr>
-        <p:txBody>
-          <a:bodyPr wrap="square">
-            <a:spAutoFit/>
-          </a:bodyPr>
-          <a:lstStyle/>
-          <a:p>
-            <a:pPr algn="ctr"/>
-            <a:r>
-              <a:rPr sz="4400" b="1" i="0">
+            <a:off x="640080" y="2052828"/>
+            <a:ext cx="10911535" cy="731520"/>
+          </a:xfrm>
+          <a:prstGeom prst="rect">
+            <a:avLst/>
+          </a:prstGeom>
+          <a:noFill/>
+        </p:spPr>
+        <p:txBody>
+          <a:bodyPr wrap="square">
+            <a:spAutoFit/>
+          </a:bodyPr>
+          <a:lstStyle/>
+          <a:p>
+            <a:pPr algn="ctr"/>
+            <a:r>
+              <a:rPr sz="4800" b="1" i="0">
                 <a:solidFill>
                   <a:srgbClr val="FFFFFF"/>
                 </a:solidFill>
@@ -5931,99 +5441,29 @@
         </p:nvSpPr>
         <p:spPr>
           <a:xfrm>
-            <a:off x="594360" y="2980944"/>
-            <a:ext cx="11002975" cy="347472"/>
-          </a:xfrm>
-          <a:prstGeom prst="rect">
-            <a:avLst/>
-          </a:prstGeom>
-          <a:noFill/>
-        </p:spPr>
-        <p:txBody>
-          <a:bodyPr wrap="square">
-            <a:spAutoFit/>
-          </a:bodyPr>
-          <a:lstStyle/>
-          <a:p>
-            <a:pPr algn="ctr"/>
-            <a:r>
-              <a:rPr sz="2200" b="0" i="1">
-                <a:solidFill>
-                  <a:srgbClr val="8C8C8C"/>
-                </a:solidFill>
-                <a:latin typeface="Arial"/>
-              </a:rPr>
-              <a:t/>
-            </a:r>
-          </a:p>
-        </p:txBody>
-      </p:sp>
-      <p:sp>
-        <p:nvSpPr>
-          <p:cNvPr id="4" name="TextBox 3"/>
-          <p:cNvSpPr txBox="1"/>
-          <p:nvPr/>
-        </p:nvSpPr>
-        <p:spPr>
-          <a:xfrm>
-            <a:off x="594360" y="3529584"/>
-            <a:ext cx="11002975" cy="685800"/>
-          </a:xfrm>
-          <a:prstGeom prst="rect">
-            <a:avLst/>
-          </a:prstGeom>
-          <a:noFill/>
-        </p:spPr>
-        <p:txBody>
-          <a:bodyPr wrap="square">
-            <a:spAutoFit/>
-          </a:bodyPr>
-          <a:lstStyle/>
-          <a:p>
-            <a:pPr algn="ctr"/>
-            <a:r>
-              <a:rPr sz="4400" b="1" i="0">
+            <a:off x="640080" y="2985516"/>
+            <a:ext cx="10911535" cy="731520"/>
+          </a:xfrm>
+          <a:prstGeom prst="rect">
+            <a:avLst/>
+          </a:prstGeom>
+          <a:noFill/>
+        </p:spPr>
+        <p:txBody>
+          <a:bodyPr wrap="square">
+            <a:spAutoFit/>
+          </a:bodyPr>
+          <a:lstStyle/>
+          <a:p>
+            <a:pPr algn="ctr"/>
+            <a:r>
+              <a:rPr sz="4800" b="1" i="0">
                 <a:solidFill>
                   <a:srgbClr val="FFFFFF"/>
                 </a:solidFill>
                 <a:latin typeface="Arial"/>
               </a:rPr>
               <a:t>Eu te dou tudo</a:t>
-            </a:r>
-          </a:p>
-        </p:txBody>
-      </p:sp>
-      <p:sp>
-        <p:nvSpPr>
-          <p:cNvPr id="5" name="TextBox 4"/>
-          <p:cNvSpPr txBox="1"/>
-          <p:nvPr/>
-        </p:nvSpPr>
-        <p:spPr>
-          <a:xfrm>
-            <a:off x="594360" y="4251960"/>
-            <a:ext cx="11002975" cy="347472"/>
-          </a:xfrm>
-          <a:prstGeom prst="rect">
-            <a:avLst/>
-          </a:prstGeom>
-          <a:noFill/>
-        </p:spPr>
-        <p:txBody>
-          <a:bodyPr wrap="square">
-            <a:spAutoFit/>
-          </a:bodyPr>
-          <a:lstStyle/>
-          <a:p>
-            <a:pPr algn="ctr"/>
-            <a:r>
-              <a:rPr sz="2200" b="0" i="1">
-                <a:solidFill>
-                  <a:srgbClr val="8C8C8C"/>
-                </a:solidFill>
-                <a:latin typeface="Arial"/>
-              </a:rPr>
-              <a:t/>
             </a:r>
           </a:p>
         </p:txBody>
@@ -6062,23 +5502,23 @@
         </p:nvSpPr>
         <p:spPr>
           <a:xfrm>
-            <a:off x="594360" y="1837944"/>
-            <a:ext cx="11002975" cy="685800"/>
-          </a:xfrm>
-          <a:prstGeom prst="rect">
-            <a:avLst/>
-          </a:prstGeom>
-          <a:noFill/>
-        </p:spPr>
-        <p:txBody>
-          <a:bodyPr wrap="square">
-            <a:spAutoFit/>
-          </a:bodyPr>
-          <a:lstStyle/>
-          <a:p>
-            <a:pPr algn="ctr"/>
-            <a:r>
-              <a:rPr sz="4400" b="1" i="0">
+            <a:off x="640080" y="1650492"/>
+            <a:ext cx="10911535" cy="731520"/>
+          </a:xfrm>
+          <a:prstGeom prst="rect">
+            <a:avLst/>
+          </a:prstGeom>
+          <a:noFill/>
+        </p:spPr>
+        <p:txBody>
+          <a:bodyPr wrap="square">
+            <a:spAutoFit/>
+          </a:bodyPr>
+          <a:lstStyle/>
+          <a:p>
+            <a:pPr algn="ctr"/>
+            <a:r>
+              <a:rPr sz="4800" b="1" i="0">
                 <a:solidFill>
                   <a:srgbClr val="FFFFFF"/>
                 </a:solidFill>
@@ -6097,8 +5537,8 @@
         </p:nvSpPr>
         <p:spPr>
           <a:xfrm>
-            <a:off x="594360" y="2560320"/>
-            <a:ext cx="11002975" cy="384048"/>
+            <a:off x="640080" y="2418588"/>
+            <a:ext cx="10911535" cy="365760"/>
           </a:xfrm>
           <a:prstGeom prst="rect">
             <a:avLst/>
@@ -6115,7 +5555,7 @@
             <a:r>
               <a:rPr sz="2400" b="0" i="1">
                 <a:solidFill>
-                  <a:srgbClr val="B4B4B4"/>
+                  <a:srgbClr val="AAAAAA"/>
                 </a:solidFill>
                 <a:latin typeface="Arial"/>
               </a:rPr>
@@ -6132,8 +5572,78 @@
         </p:nvSpPr>
         <p:spPr>
           <a:xfrm>
-            <a:off x="594360" y="2980944"/>
-            <a:ext cx="11002975" cy="347472"/>
+            <a:off x="640080" y="2985516"/>
+            <a:ext cx="10911535" cy="731520"/>
+          </a:xfrm>
+          <a:prstGeom prst="rect">
+            <a:avLst/>
+          </a:prstGeom>
+          <a:noFill/>
+        </p:spPr>
+        <p:txBody>
+          <a:bodyPr wrap="square">
+            <a:spAutoFit/>
+          </a:bodyPr>
+          <a:lstStyle/>
+          <a:p>
+            <a:pPr algn="ctr"/>
+            <a:r>
+              <a:rPr sz="4800" b="1" i="0">
+                <a:solidFill>
+                  <a:srgbClr val="FFFFFF"/>
+                </a:solidFill>
+                <a:latin typeface="Arial"/>
+              </a:rPr>
+              <a:t>私に       よく  して-く-れ-た</a:t>
+            </a:r>
+          </a:p>
+        </p:txBody>
+      </p:sp>
+      <p:sp>
+        <p:nvSpPr>
+          <p:cNvPr id="5" name="TextBox 4"/>
+          <p:cNvSpPr txBox="1"/>
+          <p:nvPr/>
+        </p:nvSpPr>
+        <p:spPr>
+          <a:xfrm>
+            <a:off x="640080" y="3753612"/>
+            <a:ext cx="10911535" cy="365760"/>
+          </a:xfrm>
+          <a:prstGeom prst="rect">
+            <a:avLst/>
+          </a:prstGeom>
+          <a:noFill/>
+        </p:spPr>
+        <p:txBody>
+          <a:bodyPr wrap="square">
+            <a:spAutoFit/>
+          </a:bodyPr>
+          <a:lstStyle/>
+          <a:p>
+            <a:pPr algn="ctr"/>
+            <a:r>
+              <a:rPr sz="2400" b="0" i="1">
+                <a:solidFill>
+                  <a:srgbClr val="AAAAAA"/>
+                </a:solidFill>
+                <a:latin typeface="Arial"/>
+              </a:rPr>
+              <a:t>watashi-ni yoku shite ku-re-ta</a:t>
+            </a:r>
+          </a:p>
+        </p:txBody>
+      </p:sp>
+      <p:sp>
+        <p:nvSpPr>
+          <p:cNvPr id="6" name="TextBox 5"/>
+          <p:cNvSpPr txBox="1"/>
+          <p:nvPr/>
+        </p:nvSpPr>
+        <p:spPr>
+          <a:xfrm>
+            <a:off x="640080" y="4530852"/>
+            <a:ext cx="10911535" cy="310896"/>
           </a:xfrm>
           <a:prstGeom prst="rect">
             <a:avLst/>
@@ -6150,7 +5660,7 @@
             <a:r>
               <a:rPr sz="2000" b="0" i="1">
                 <a:solidFill>
-                  <a:srgbClr val="8C8C8C"/>
+                  <a:srgbClr val="828282"/>
                 </a:solidFill>
                 <a:latin typeface="Arial"/>
               </a:rPr>
@@ -6161,84 +5671,14 @@
       </p:sp>
       <p:sp>
         <p:nvSpPr>
-          <p:cNvPr id="5" name="TextBox 4"/>
-          <p:cNvSpPr txBox="1"/>
-          <p:nvPr/>
-        </p:nvSpPr>
-        <p:spPr>
-          <a:xfrm>
-            <a:off x="594360" y="3529584"/>
-            <a:ext cx="11002975" cy="685800"/>
-          </a:xfrm>
-          <a:prstGeom prst="rect">
-            <a:avLst/>
-          </a:prstGeom>
-          <a:noFill/>
-        </p:spPr>
-        <p:txBody>
-          <a:bodyPr wrap="square">
-            <a:spAutoFit/>
-          </a:bodyPr>
-          <a:lstStyle/>
-          <a:p>
-            <a:pPr algn="ctr"/>
-            <a:r>
-              <a:rPr sz="4400" b="1" i="0">
-                <a:solidFill>
-                  <a:srgbClr val="FFFFFF"/>
-                </a:solidFill>
-                <a:latin typeface="Arial"/>
-              </a:rPr>
-              <a:t>私に       よく  して-く-れ-た</a:t>
-            </a:r>
-          </a:p>
-        </p:txBody>
-      </p:sp>
-      <p:sp>
-        <p:nvSpPr>
-          <p:cNvPr id="6" name="TextBox 5"/>
-          <p:cNvSpPr txBox="1"/>
-          <p:nvPr/>
-        </p:nvSpPr>
-        <p:spPr>
-          <a:xfrm>
-            <a:off x="594360" y="4251960"/>
-            <a:ext cx="11002975" cy="384048"/>
-          </a:xfrm>
-          <a:prstGeom prst="rect">
-            <a:avLst/>
-          </a:prstGeom>
-          <a:noFill/>
-        </p:spPr>
-        <p:txBody>
-          <a:bodyPr wrap="square">
-            <a:spAutoFit/>
-          </a:bodyPr>
-          <a:lstStyle/>
-          <a:p>
-            <a:pPr algn="ctr"/>
-            <a:r>
-              <a:rPr sz="2400" b="0" i="1">
-                <a:solidFill>
-                  <a:srgbClr val="B4B4B4"/>
-                </a:solidFill>
-                <a:latin typeface="Arial"/>
-              </a:rPr>
-              <a:t>watashi-ni yoku shite ku-re-ta</a:t>
-            </a:r>
-          </a:p>
-        </p:txBody>
-      </p:sp>
-      <p:sp>
-        <p:nvSpPr>
           <p:cNvPr id="7" name="TextBox 6"/>
           <p:cNvSpPr txBox="1"/>
           <p:nvPr/>
         </p:nvSpPr>
         <p:spPr>
           <a:xfrm>
-            <a:off x="594360" y="4672584"/>
-            <a:ext cx="11002975" cy="347472"/>
+            <a:off x="640080" y="4896612"/>
+            <a:ext cx="10911535" cy="310896"/>
           </a:xfrm>
           <a:prstGeom prst="rect">
             <a:avLst/>
@@ -6255,7 +5695,7 @@
             <a:r>
               <a:rPr sz="2000" b="0" i="1">
                 <a:solidFill>
-                  <a:srgbClr val="8C8C8C"/>
+                  <a:srgbClr val="828282"/>
                 </a:solidFill>
                 <a:latin typeface="Arial"/>
               </a:rPr>
@@ -6298,23 +5738,23 @@
         </p:nvSpPr>
         <p:spPr>
           <a:xfrm>
-            <a:off x="594360" y="1837944"/>
-            <a:ext cx="11002975" cy="685800"/>
-          </a:xfrm>
-          <a:prstGeom prst="rect">
-            <a:avLst/>
-          </a:prstGeom>
-          <a:noFill/>
-        </p:spPr>
-        <p:txBody>
-          <a:bodyPr wrap="square">
-            <a:spAutoFit/>
-          </a:bodyPr>
-          <a:lstStyle/>
-          <a:p>
-            <a:pPr algn="ctr"/>
-            <a:r>
-              <a:rPr sz="4400" b="1" i="0">
+            <a:off x="640080" y="1650492"/>
+            <a:ext cx="10911535" cy="731520"/>
+          </a:xfrm>
+          <a:prstGeom prst="rect">
+            <a:avLst/>
+          </a:prstGeom>
+          <a:noFill/>
+        </p:spPr>
+        <p:txBody>
+          <a:bodyPr wrap="square">
+            <a:spAutoFit/>
+          </a:bodyPr>
+          <a:lstStyle/>
+          <a:p>
+            <a:pPr algn="ctr"/>
+            <a:r>
+              <a:rPr sz="4800" b="1" i="0">
                 <a:solidFill>
                   <a:srgbClr val="FFFFFF"/>
                 </a:solidFill>
@@ -6333,8 +5773,8 @@
         </p:nvSpPr>
         <p:spPr>
           <a:xfrm>
-            <a:off x="594360" y="2560320"/>
-            <a:ext cx="11002975" cy="384048"/>
+            <a:off x="640080" y="2418588"/>
+            <a:ext cx="10911535" cy="365760"/>
           </a:xfrm>
           <a:prstGeom prst="rect">
             <a:avLst/>
@@ -6351,7 +5791,7 @@
             <a:r>
               <a:rPr sz="2400" b="0" i="1">
                 <a:solidFill>
-                  <a:srgbClr val="B4B4B4"/>
+                  <a:srgbClr val="AAAAAA"/>
                 </a:solidFill>
                 <a:latin typeface="Arial"/>
               </a:rPr>
@@ -6368,8 +5808,78 @@
         </p:nvSpPr>
         <p:spPr>
           <a:xfrm>
-            <a:off x="594360" y="2980944"/>
-            <a:ext cx="11002975" cy="347472"/>
+            <a:off x="640080" y="2985516"/>
+            <a:ext cx="10911535" cy="731520"/>
+          </a:xfrm>
+          <a:prstGeom prst="rect">
+            <a:avLst/>
+          </a:prstGeom>
+          <a:noFill/>
+        </p:spPr>
+        <p:txBody>
+          <a:bodyPr wrap="square">
+            <a:spAutoFit/>
+          </a:bodyPr>
+          <a:lstStyle/>
+          <a:p>
+            <a:pPr algn="ctr"/>
+            <a:r>
+              <a:rPr sz="4800" b="1" i="0">
+                <a:solidFill>
+                  <a:srgbClr val="FFFFFF"/>
+                </a:solidFill>
+                <a:latin typeface="Arial"/>
+              </a:rPr>
+              <a:t>歌おう神のめぐみを</a:t>
+            </a:r>
+          </a:p>
+        </p:txBody>
+      </p:sp>
+      <p:sp>
+        <p:nvSpPr>
+          <p:cNvPr id="5" name="TextBox 4"/>
+          <p:cNvSpPr txBox="1"/>
+          <p:nvPr/>
+        </p:nvSpPr>
+        <p:spPr>
+          <a:xfrm>
+            <a:off x="640080" y="3753612"/>
+            <a:ext cx="10911535" cy="365760"/>
+          </a:xfrm>
+          <a:prstGeom prst="rect">
+            <a:avLst/>
+          </a:prstGeom>
+          <a:noFill/>
+        </p:spPr>
+        <p:txBody>
+          <a:bodyPr wrap="square">
+            <a:spAutoFit/>
+          </a:bodyPr>
+          <a:lstStyle/>
+          <a:p>
+            <a:pPr algn="ctr"/>
+            <a:r>
+              <a:rPr sz="2400" b="0" i="1">
+                <a:solidFill>
+                  <a:srgbClr val="AAAAAA"/>
+                </a:solidFill>
+                <a:latin typeface="Arial"/>
+              </a:rPr>
+              <a:t>utaou  kamino megumio</a:t>
+            </a:r>
+          </a:p>
+        </p:txBody>
+      </p:sp>
+      <p:sp>
+        <p:nvSpPr>
+          <p:cNvPr id="6" name="TextBox 5"/>
+          <p:cNvSpPr txBox="1"/>
+          <p:nvPr/>
+        </p:nvSpPr>
+        <p:spPr>
+          <a:xfrm>
+            <a:off x="640080" y="4530852"/>
+            <a:ext cx="10911535" cy="310896"/>
           </a:xfrm>
           <a:prstGeom prst="rect">
             <a:avLst/>
@@ -6386,7 +5896,7 @@
             <a:r>
               <a:rPr sz="2000" b="0" i="1">
                 <a:solidFill>
-                  <a:srgbClr val="8C8C8C"/>
+                  <a:srgbClr val="828282"/>
                 </a:solidFill>
                 <a:latin typeface="Arial"/>
               </a:rPr>
@@ -6397,84 +5907,14 @@
       </p:sp>
       <p:sp>
         <p:nvSpPr>
-          <p:cNvPr id="5" name="TextBox 4"/>
-          <p:cNvSpPr txBox="1"/>
-          <p:nvPr/>
-        </p:nvSpPr>
-        <p:spPr>
-          <a:xfrm>
-            <a:off x="594360" y="3529584"/>
-            <a:ext cx="11002975" cy="685800"/>
-          </a:xfrm>
-          <a:prstGeom prst="rect">
-            <a:avLst/>
-          </a:prstGeom>
-          <a:noFill/>
-        </p:spPr>
-        <p:txBody>
-          <a:bodyPr wrap="square">
-            <a:spAutoFit/>
-          </a:bodyPr>
-          <a:lstStyle/>
-          <a:p>
-            <a:pPr algn="ctr"/>
-            <a:r>
-              <a:rPr sz="4400" b="1" i="0">
-                <a:solidFill>
-                  <a:srgbClr val="FFFFFF"/>
-                </a:solidFill>
-                <a:latin typeface="Arial"/>
-              </a:rPr>
-              <a:t>歌おう神のめぐみを</a:t>
-            </a:r>
-          </a:p>
-        </p:txBody>
-      </p:sp>
-      <p:sp>
-        <p:nvSpPr>
-          <p:cNvPr id="6" name="TextBox 5"/>
-          <p:cNvSpPr txBox="1"/>
-          <p:nvPr/>
-        </p:nvSpPr>
-        <p:spPr>
-          <a:xfrm>
-            <a:off x="594360" y="4251960"/>
-            <a:ext cx="11002975" cy="384048"/>
-          </a:xfrm>
-          <a:prstGeom prst="rect">
-            <a:avLst/>
-          </a:prstGeom>
-          <a:noFill/>
-        </p:spPr>
-        <p:txBody>
-          <a:bodyPr wrap="square">
-            <a:spAutoFit/>
-          </a:bodyPr>
-          <a:lstStyle/>
-          <a:p>
-            <a:pPr algn="ctr"/>
-            <a:r>
-              <a:rPr sz="2400" b="0" i="1">
-                <a:solidFill>
-                  <a:srgbClr val="B4B4B4"/>
-                </a:solidFill>
-                <a:latin typeface="Arial"/>
-              </a:rPr>
-              <a:t>utaou  kamino megumio</a:t>
-            </a:r>
-          </a:p>
-        </p:txBody>
-      </p:sp>
-      <p:sp>
-        <p:nvSpPr>
           <p:cNvPr id="7" name="TextBox 6"/>
           <p:cNvSpPr txBox="1"/>
           <p:nvPr/>
         </p:nvSpPr>
         <p:spPr>
           <a:xfrm>
-            <a:off x="594360" y="4672584"/>
-            <a:ext cx="11002975" cy="347472"/>
+            <a:off x="640080" y="4896612"/>
+            <a:ext cx="10911535" cy="310896"/>
           </a:xfrm>
           <a:prstGeom prst="rect">
             <a:avLst/>
@@ -6491,7 +5931,7 @@
             <a:r>
               <a:rPr sz="2000" b="0" i="1">
                 <a:solidFill>
-                  <a:srgbClr val="8C8C8C"/>
+                  <a:srgbClr val="828282"/>
                 </a:solidFill>
                 <a:latin typeface="Arial"/>
               </a:rPr>
@@ -6534,23 +5974,23 @@
         </p:nvSpPr>
         <p:spPr>
           <a:xfrm>
-            <a:off x="594360" y="2258568"/>
-            <a:ext cx="11002975" cy="685800"/>
-          </a:xfrm>
-          <a:prstGeom prst="rect">
-            <a:avLst/>
-          </a:prstGeom>
-          <a:noFill/>
-        </p:spPr>
-        <p:txBody>
-          <a:bodyPr wrap="square">
-            <a:spAutoFit/>
-          </a:bodyPr>
-          <a:lstStyle/>
-          <a:p>
-            <a:pPr algn="ctr"/>
-            <a:r>
-              <a:rPr sz="4400" b="1" i="0">
+            <a:off x="640080" y="2052828"/>
+            <a:ext cx="10911535" cy="731520"/>
+          </a:xfrm>
+          <a:prstGeom prst="rect">
+            <a:avLst/>
+          </a:prstGeom>
+          <a:noFill/>
+        </p:spPr>
+        <p:txBody>
+          <a:bodyPr wrap="square">
+            <a:spAutoFit/>
+          </a:bodyPr>
+          <a:lstStyle/>
+          <a:p>
+            <a:pPr algn="ctr"/>
+            <a:r>
+              <a:rPr sz="4800" b="1" i="0">
                 <a:solidFill>
                   <a:srgbClr val="FFFFFF"/>
                 </a:solidFill>
@@ -6569,99 +6009,29 @@
         </p:nvSpPr>
         <p:spPr>
           <a:xfrm>
-            <a:off x="594360" y="2980944"/>
-            <a:ext cx="11002975" cy="347472"/>
-          </a:xfrm>
-          <a:prstGeom prst="rect">
-            <a:avLst/>
-          </a:prstGeom>
-          <a:noFill/>
-        </p:spPr>
-        <p:txBody>
-          <a:bodyPr wrap="square">
-            <a:spAutoFit/>
-          </a:bodyPr>
-          <a:lstStyle/>
-          <a:p>
-            <a:pPr algn="ctr"/>
-            <a:r>
-              <a:rPr sz="2200" b="0" i="1">
-                <a:solidFill>
-                  <a:srgbClr val="8C8C8C"/>
-                </a:solidFill>
-                <a:latin typeface="Arial"/>
-              </a:rPr>
-              <a:t/>
-            </a:r>
-          </a:p>
-        </p:txBody>
-      </p:sp>
-      <p:sp>
-        <p:nvSpPr>
-          <p:cNvPr id="4" name="TextBox 3"/>
-          <p:cNvSpPr txBox="1"/>
-          <p:nvPr/>
-        </p:nvSpPr>
-        <p:spPr>
-          <a:xfrm>
-            <a:off x="594360" y="3529584"/>
-            <a:ext cx="11002975" cy="685800"/>
-          </a:xfrm>
-          <a:prstGeom prst="rect">
-            <a:avLst/>
-          </a:prstGeom>
-          <a:noFill/>
-        </p:spPr>
-        <p:txBody>
-          <a:bodyPr wrap="square">
-            <a:spAutoFit/>
-          </a:bodyPr>
-          <a:lstStyle/>
-          <a:p>
-            <a:pPr algn="ctr"/>
-            <a:r>
-              <a:rPr sz="4400" b="1" i="0">
+            <a:off x="640080" y="2985516"/>
+            <a:ext cx="10911535" cy="731520"/>
+          </a:xfrm>
+          <a:prstGeom prst="rect">
+            <a:avLst/>
+          </a:prstGeom>
+          <a:noFill/>
+        </p:spPr>
+        <p:txBody>
+          <a:bodyPr wrap="square">
+            <a:spAutoFit/>
+          </a:bodyPr>
+          <a:lstStyle/>
+          <a:p>
+            <a:pPr algn="ctr"/>
+            <a:r>
+              <a:rPr sz="4800" b="1" i="0">
                 <a:solidFill>
                   <a:srgbClr val="FFFFFF"/>
                 </a:solidFill>
                 <a:latin typeface="Arial"/>
               </a:rPr>
               <a:t>Eu te amo, Senhor</a:t>
-            </a:r>
-          </a:p>
-        </p:txBody>
-      </p:sp>
-      <p:sp>
-        <p:nvSpPr>
-          <p:cNvPr id="5" name="TextBox 4"/>
-          <p:cNvSpPr txBox="1"/>
-          <p:nvPr/>
-        </p:nvSpPr>
-        <p:spPr>
-          <a:xfrm>
-            <a:off x="594360" y="4251960"/>
-            <a:ext cx="11002975" cy="347472"/>
-          </a:xfrm>
-          <a:prstGeom prst="rect">
-            <a:avLst/>
-          </a:prstGeom>
-          <a:noFill/>
-        </p:spPr>
-        <p:txBody>
-          <a:bodyPr wrap="square">
-            <a:spAutoFit/>
-          </a:bodyPr>
-          <a:lstStyle/>
-          <a:p>
-            <a:pPr algn="ctr"/>
-            <a:r>
-              <a:rPr sz="2200" b="0" i="1">
-                <a:solidFill>
-                  <a:srgbClr val="8C8C8C"/>
-                </a:solidFill>
-                <a:latin typeface="Arial"/>
-              </a:rPr>
-              <a:t/>
             </a:r>
           </a:p>
         </p:txBody>
@@ -6700,23 +6070,23 @@
         </p:nvSpPr>
         <p:spPr>
           <a:xfrm>
-            <a:off x="594360" y="2258568"/>
-            <a:ext cx="11002975" cy="685800"/>
-          </a:xfrm>
-          <a:prstGeom prst="rect">
-            <a:avLst/>
-          </a:prstGeom>
-          <a:noFill/>
-        </p:spPr>
-        <p:txBody>
-          <a:bodyPr wrap="square">
-            <a:spAutoFit/>
-          </a:bodyPr>
-          <a:lstStyle/>
-          <a:p>
-            <a:pPr algn="ctr"/>
-            <a:r>
-              <a:rPr sz="3911" b="1" i="0">
+            <a:off x="640080" y="2052828"/>
+            <a:ext cx="10911535" cy="731520"/>
+          </a:xfrm>
+          <a:prstGeom prst="rect">
+            <a:avLst/>
+          </a:prstGeom>
+          <a:noFill/>
+        </p:spPr>
+        <p:txBody>
+          <a:bodyPr wrap="square">
+            <a:spAutoFit/>
+          </a:bodyPr>
+          <a:lstStyle/>
+          <a:p>
+            <a:pPr algn="ctr"/>
+            <a:r>
+              <a:rPr sz="4200" b="1" i="0">
                 <a:solidFill>
                   <a:srgbClr val="FFFFFF"/>
                 </a:solidFill>
@@ -6735,99 +6105,29 @@
         </p:nvSpPr>
         <p:spPr>
           <a:xfrm>
-            <a:off x="594360" y="2980944"/>
-            <a:ext cx="11002975" cy="347472"/>
-          </a:xfrm>
-          <a:prstGeom prst="rect">
-            <a:avLst/>
-          </a:prstGeom>
-          <a:noFill/>
-        </p:spPr>
-        <p:txBody>
-          <a:bodyPr wrap="square">
-            <a:spAutoFit/>
-          </a:bodyPr>
-          <a:lstStyle/>
-          <a:p>
-            <a:pPr algn="ctr"/>
-            <a:r>
-              <a:rPr sz="2200" b="0" i="1">
-                <a:solidFill>
-                  <a:srgbClr val="8C8C8C"/>
-                </a:solidFill>
-                <a:latin typeface="Arial"/>
-              </a:rPr>
-              <a:t/>
-            </a:r>
-          </a:p>
-        </p:txBody>
-      </p:sp>
-      <p:sp>
-        <p:nvSpPr>
-          <p:cNvPr id="4" name="TextBox 3"/>
-          <p:cNvSpPr txBox="1"/>
-          <p:nvPr/>
-        </p:nvSpPr>
-        <p:spPr>
-          <a:xfrm>
-            <a:off x="594360" y="3529584"/>
-            <a:ext cx="11002975" cy="685800"/>
-          </a:xfrm>
-          <a:prstGeom prst="rect">
-            <a:avLst/>
-          </a:prstGeom>
-          <a:noFill/>
-        </p:spPr>
-        <p:txBody>
-          <a:bodyPr wrap="square">
-            <a:spAutoFit/>
-          </a:bodyPr>
-          <a:lstStyle/>
-          <a:p>
-            <a:pPr algn="ctr"/>
-            <a:r>
-              <a:rPr sz="4400" b="1" i="0">
+            <a:off x="640080" y="2985516"/>
+            <a:ext cx="10911535" cy="731520"/>
+          </a:xfrm>
+          <a:prstGeom prst="rect">
+            <a:avLst/>
+          </a:prstGeom>
+          <a:noFill/>
+        </p:spPr>
+        <p:txBody>
+          <a:bodyPr wrap="square">
+            <a:spAutoFit/>
+          </a:bodyPr>
+          <a:lstStyle/>
+          <a:p>
+            <a:pPr algn="ctr"/>
+            <a:r>
+              <a:rPr sz="4800" b="1" i="0">
                 <a:solidFill>
                   <a:srgbClr val="FFFFFF"/>
                 </a:solidFill>
                 <a:latin typeface="Arial"/>
               </a:rPr>
               <a:t>Todos os meus dias</a:t>
-            </a:r>
-          </a:p>
-        </p:txBody>
-      </p:sp>
-      <p:sp>
-        <p:nvSpPr>
-          <p:cNvPr id="5" name="TextBox 4"/>
-          <p:cNvSpPr txBox="1"/>
-          <p:nvPr/>
-        </p:nvSpPr>
-        <p:spPr>
-          <a:xfrm>
-            <a:off x="594360" y="4251960"/>
-            <a:ext cx="11002975" cy="347472"/>
-          </a:xfrm>
-          <a:prstGeom prst="rect">
-            <a:avLst/>
-          </a:prstGeom>
-          <a:noFill/>
-        </p:spPr>
-        <p:txBody>
-          <a:bodyPr wrap="square">
-            <a:spAutoFit/>
-          </a:bodyPr>
-          <a:lstStyle/>
-          <a:p>
-            <a:pPr algn="ctr"/>
-            <a:r>
-              <a:rPr sz="2200" b="0" i="1">
-                <a:solidFill>
-                  <a:srgbClr val="8C8C8C"/>
-                </a:solidFill>
-                <a:latin typeface="Arial"/>
-              </a:rPr>
-              <a:t/>
             </a:r>
           </a:p>
         </p:txBody>
@@ -6866,23 +6166,23 @@
         </p:nvSpPr>
         <p:spPr>
           <a:xfrm>
-            <a:off x="594360" y="2258568"/>
-            <a:ext cx="11002975" cy="685800"/>
-          </a:xfrm>
-          <a:prstGeom prst="rect">
-            <a:avLst/>
-          </a:prstGeom>
-          <a:noFill/>
-        </p:spPr>
-        <p:txBody>
-          <a:bodyPr wrap="square">
-            <a:spAutoFit/>
-          </a:bodyPr>
-          <a:lstStyle/>
-          <a:p>
-            <a:pPr algn="ctr"/>
-            <a:r>
-              <a:rPr sz="4400" b="1" i="0">
+            <a:off x="640080" y="2052828"/>
+            <a:ext cx="10911535" cy="731520"/>
+          </a:xfrm>
+          <a:prstGeom prst="rect">
+            <a:avLst/>
+          </a:prstGeom>
+          <a:noFill/>
+        </p:spPr>
+        <p:txBody>
+          <a:bodyPr wrap="square">
+            <a:spAutoFit/>
+          </a:bodyPr>
+          <a:lstStyle/>
+          <a:p>
+            <a:pPr algn="ctr"/>
+            <a:r>
+              <a:rPr sz="4800" b="1" i="0">
                 <a:solidFill>
                   <a:srgbClr val="FFFFFF"/>
                 </a:solidFill>
@@ -6901,99 +6201,29 @@
         </p:nvSpPr>
         <p:spPr>
           <a:xfrm>
-            <a:off x="594360" y="2980944"/>
-            <a:ext cx="11002975" cy="347472"/>
-          </a:xfrm>
-          <a:prstGeom prst="rect">
-            <a:avLst/>
-          </a:prstGeom>
-          <a:noFill/>
-        </p:spPr>
-        <p:txBody>
-          <a:bodyPr wrap="square">
-            <a:spAutoFit/>
-          </a:bodyPr>
-          <a:lstStyle/>
-          <a:p>
-            <a:pPr algn="ctr"/>
-            <a:r>
-              <a:rPr sz="2200" b="0" i="1">
-                <a:solidFill>
-                  <a:srgbClr val="8C8C8C"/>
-                </a:solidFill>
-                <a:latin typeface="Arial"/>
-              </a:rPr>
-              <a:t/>
-            </a:r>
-          </a:p>
-        </p:txBody>
-      </p:sp>
-      <p:sp>
-        <p:nvSpPr>
-          <p:cNvPr id="4" name="TextBox 3"/>
-          <p:cNvSpPr txBox="1"/>
-          <p:nvPr/>
-        </p:nvSpPr>
-        <p:spPr>
-          <a:xfrm>
-            <a:off x="594360" y="3529584"/>
-            <a:ext cx="11002975" cy="685800"/>
-          </a:xfrm>
-          <a:prstGeom prst="rect">
-            <a:avLst/>
-          </a:prstGeom>
-          <a:noFill/>
-        </p:spPr>
-        <p:txBody>
-          <a:bodyPr wrap="square">
-            <a:spAutoFit/>
-          </a:bodyPr>
-          <a:lstStyle/>
-          <a:p>
-            <a:pPr algn="ctr"/>
-            <a:r>
-              <a:rPr sz="4266" b="1" i="0">
+            <a:off x="640080" y="2985516"/>
+            <a:ext cx="10911535" cy="731520"/>
+          </a:xfrm>
+          <a:prstGeom prst="rect">
+            <a:avLst/>
+          </a:prstGeom>
+          <a:noFill/>
+        </p:spPr>
+        <p:txBody>
+          <a:bodyPr wrap="square">
+            <a:spAutoFit/>
+          </a:bodyPr>
+          <a:lstStyle/>
+          <a:p>
+            <a:pPr algn="ctr"/>
+            <a:r>
+              <a:rPr sz="4600" b="1" i="0">
                 <a:solidFill>
                   <a:srgbClr val="FFFFFF"/>
                 </a:solidFill>
                 <a:latin typeface="Arial"/>
               </a:rPr>
               <a:t>A partir do momento que eu acordo</a:t>
-            </a:r>
-          </a:p>
-        </p:txBody>
-      </p:sp>
-      <p:sp>
-        <p:nvSpPr>
-          <p:cNvPr id="5" name="TextBox 4"/>
-          <p:cNvSpPr txBox="1"/>
-          <p:nvPr/>
-        </p:nvSpPr>
-        <p:spPr>
-          <a:xfrm>
-            <a:off x="594360" y="4251960"/>
-            <a:ext cx="11002975" cy="347472"/>
-          </a:xfrm>
-          <a:prstGeom prst="rect">
-            <a:avLst/>
-          </a:prstGeom>
-          <a:noFill/>
-        </p:spPr>
-        <p:txBody>
-          <a:bodyPr wrap="square">
-            <a:spAutoFit/>
-          </a:bodyPr>
-          <a:lstStyle/>
-          <a:p>
-            <a:pPr algn="ctr"/>
-            <a:r>
-              <a:rPr sz="2200" b="0" i="1">
-                <a:solidFill>
-                  <a:srgbClr val="8C8C8C"/>
-                </a:solidFill>
-                <a:latin typeface="Arial"/>
-              </a:rPr>
-              <a:t/>
             </a:r>
           </a:p>
         </p:txBody>
@@ -7032,23 +6262,23 @@
         </p:nvSpPr>
         <p:spPr>
           <a:xfrm>
-            <a:off x="594360" y="2258568"/>
-            <a:ext cx="11002975" cy="685800"/>
-          </a:xfrm>
-          <a:prstGeom prst="rect">
-            <a:avLst/>
-          </a:prstGeom>
-          <a:noFill/>
-        </p:spPr>
-        <p:txBody>
-          <a:bodyPr wrap="square">
-            <a:spAutoFit/>
-          </a:bodyPr>
-          <a:lstStyle/>
-          <a:p>
-            <a:pPr algn="ctr"/>
-            <a:r>
-              <a:rPr sz="4400" b="1" i="0">
+            <a:off x="640080" y="2052828"/>
+            <a:ext cx="10911535" cy="731520"/>
+          </a:xfrm>
+          <a:prstGeom prst="rect">
+            <a:avLst/>
+          </a:prstGeom>
+          <a:noFill/>
+        </p:spPr>
+        <p:txBody>
+          <a:bodyPr wrap="square">
+            <a:spAutoFit/>
+          </a:bodyPr>
+          <a:lstStyle/>
+          <a:p>
+            <a:pPr algn="ctr"/>
+            <a:r>
+              <a:rPr sz="4800" b="1" i="0">
                 <a:solidFill>
                   <a:srgbClr val="FFFFFF"/>
                 </a:solidFill>
@@ -7067,25 +6297,60 @@
         </p:nvSpPr>
         <p:spPr>
           <a:xfrm>
-            <a:off x="594360" y="2980944"/>
-            <a:ext cx="11002975" cy="347472"/>
-          </a:xfrm>
-          <a:prstGeom prst="rect">
-            <a:avLst/>
-          </a:prstGeom>
-          <a:noFill/>
-        </p:spPr>
-        <p:txBody>
-          <a:bodyPr wrap="square">
-            <a:spAutoFit/>
-          </a:bodyPr>
-          <a:lstStyle/>
-          <a:p>
-            <a:pPr algn="ctr"/>
-            <a:r>
-              <a:rPr sz="2200" b="0" i="1">
-                <a:solidFill>
-                  <a:srgbClr val="8C8C8C"/>
+            <a:off x="640080" y="2985516"/>
+            <a:ext cx="10911535" cy="731520"/>
+          </a:xfrm>
+          <a:prstGeom prst="rect">
+            <a:avLst/>
+          </a:prstGeom>
+          <a:noFill/>
+        </p:spPr>
+        <p:txBody>
+          <a:bodyPr wrap="square">
+            <a:spAutoFit/>
+          </a:bodyPr>
+          <a:lstStyle/>
+          <a:p>
+            <a:pPr algn="ctr"/>
+            <a:r>
+              <a:rPr sz="4300" b="1" i="0">
+                <a:solidFill>
+                  <a:srgbClr val="FFFFFF"/>
+                </a:solidFill>
+                <a:latin typeface="Arial"/>
+              </a:rPr>
+              <a:t>Ai eu vou cantar da bondade de Deus</a:t>
+            </a:r>
+          </a:p>
+        </p:txBody>
+      </p:sp>
+      <p:sp>
+        <p:nvSpPr>
+          <p:cNvPr id="4" name="TextBox 3"/>
+          <p:cNvSpPr txBox="1"/>
+          <p:nvPr/>
+        </p:nvSpPr>
+        <p:spPr>
+          <a:xfrm>
+            <a:off x="640080" y="4128516"/>
+            <a:ext cx="10911535" cy="310896"/>
+          </a:xfrm>
+          <a:prstGeom prst="rect">
+            <a:avLst/>
+          </a:prstGeom>
+          <a:noFill/>
+        </p:spPr>
+        <p:txBody>
+          <a:bodyPr wrap="square">
+            <a:spAutoFit/>
+          </a:bodyPr>
+          <a:lstStyle/>
+          <a:p>
+            <a:pPr algn="ctr"/>
+            <a:r>
+              <a:rPr sz="2000" b="0" i="0">
+                <a:solidFill>
+                  <a:srgbClr val="828282"/>
                 </a:solidFill>
                 <a:latin typeface="Arial"/>
               </a:rPr>
@@ -7096,66 +6361,31 @@
       </p:sp>
       <p:sp>
         <p:nvSpPr>
-          <p:cNvPr id="4" name="TextBox 3"/>
-          <p:cNvSpPr txBox="1"/>
-          <p:nvPr/>
-        </p:nvSpPr>
-        <p:spPr>
-          <a:xfrm>
-            <a:off x="594360" y="3529584"/>
-            <a:ext cx="11002975" cy="685800"/>
-          </a:xfrm>
-          <a:prstGeom prst="rect">
-            <a:avLst/>
-          </a:prstGeom>
-          <a:noFill/>
-        </p:spPr>
-        <p:txBody>
-          <a:bodyPr wrap="square">
-            <a:spAutoFit/>
-          </a:bodyPr>
-          <a:lstStyle/>
-          <a:p>
-            <a:pPr algn="ctr"/>
-            <a:r>
-              <a:rPr sz="4022" b="1" i="0">
-                <a:solidFill>
-                  <a:srgbClr val="FFFFFF"/>
-                </a:solidFill>
-                <a:latin typeface="Arial"/>
-              </a:rPr>
-              <a:t>Ai eu vou cantar da bondade de Deus</a:t>
-            </a:r>
-          </a:p>
-        </p:txBody>
-      </p:sp>
-      <p:sp>
-        <p:nvSpPr>
           <p:cNvPr id="5" name="TextBox 4"/>
           <p:cNvSpPr txBox="1"/>
           <p:nvPr/>
         </p:nvSpPr>
         <p:spPr>
           <a:xfrm>
-            <a:off x="594360" y="4251960"/>
-            <a:ext cx="11002975" cy="347472"/>
-          </a:xfrm>
-          <a:prstGeom prst="rect">
-            <a:avLst/>
-          </a:prstGeom>
-          <a:noFill/>
-        </p:spPr>
-        <p:txBody>
-          <a:bodyPr wrap="square">
-            <a:spAutoFit/>
-          </a:bodyPr>
-          <a:lstStyle/>
-          <a:p>
-            <a:pPr algn="ctr"/>
-            <a:r>
-              <a:rPr sz="2200" b="0" i="1">
-                <a:solidFill>
-                  <a:srgbClr val="8C8C8C"/>
+            <a:off x="640080" y="4494276"/>
+            <a:ext cx="10911535" cy="310896"/>
+          </a:xfrm>
+          <a:prstGeom prst="rect">
+            <a:avLst/>
+          </a:prstGeom>
+          <a:noFill/>
+        </p:spPr>
+        <p:txBody>
+          <a:bodyPr wrap="square">
+            <a:spAutoFit/>
+          </a:bodyPr>
+          <a:lstStyle/>
+          <a:p>
+            <a:pPr algn="ctr"/>
+            <a:r>
+              <a:rPr sz="2000" b="0" i="0">
+                <a:solidFill>
+                  <a:srgbClr val="828282"/>
                 </a:solidFill>
                 <a:latin typeface="Arial"/>
               </a:rPr>
@@ -7198,23 +6428,23 @@
         </p:nvSpPr>
         <p:spPr>
           <a:xfrm>
-            <a:off x="594360" y="2258568"/>
-            <a:ext cx="11002975" cy="685800"/>
-          </a:xfrm>
-          <a:prstGeom prst="rect">
-            <a:avLst/>
-          </a:prstGeom>
-          <a:noFill/>
-        </p:spPr>
-        <p:txBody>
-          <a:bodyPr wrap="square">
-            <a:spAutoFit/>
-          </a:bodyPr>
-          <a:lstStyle/>
-          <a:p>
-            <a:pPr algn="ctr"/>
-            <a:r>
-              <a:rPr sz="4400" b="1" i="0">
+            <a:off x="640080" y="2052828"/>
+            <a:ext cx="10911535" cy="731520"/>
+          </a:xfrm>
+          <a:prstGeom prst="rect">
+            <a:avLst/>
+          </a:prstGeom>
+          <a:noFill/>
+        </p:spPr>
+        <p:txBody>
+          <a:bodyPr wrap="square">
+            <a:spAutoFit/>
+          </a:bodyPr>
+          <a:lstStyle/>
+          <a:p>
+            <a:pPr algn="ctr"/>
+            <a:r>
+              <a:rPr sz="4800" b="1" i="0">
                 <a:solidFill>
                   <a:srgbClr val="FFFFFF"/>
                 </a:solidFill>
@@ -7233,25 +6463,60 @@
         </p:nvSpPr>
         <p:spPr>
           <a:xfrm>
-            <a:off x="594360" y="2980944"/>
-            <a:ext cx="11002975" cy="347472"/>
-          </a:xfrm>
-          <a:prstGeom prst="rect">
-            <a:avLst/>
-          </a:prstGeom>
-          <a:noFill/>
-        </p:spPr>
-        <p:txBody>
-          <a:bodyPr wrap="square">
-            <a:spAutoFit/>
-          </a:bodyPr>
-          <a:lstStyle/>
-          <a:p>
-            <a:pPr algn="ctr"/>
-            <a:r>
-              <a:rPr sz="2200" b="0" i="1">
-                <a:solidFill>
-                  <a:srgbClr val="8C8C8C"/>
+            <a:off x="640080" y="2985516"/>
+            <a:ext cx="10911535" cy="731520"/>
+          </a:xfrm>
+          <a:prstGeom prst="rect">
+            <a:avLst/>
+          </a:prstGeom>
+          <a:noFill/>
+        </p:spPr>
+        <p:txBody>
+          <a:bodyPr wrap="square">
+            <a:spAutoFit/>
+          </a:bodyPr>
+          <a:lstStyle/>
+          <a:p>
+            <a:pPr algn="ctr"/>
+            <a:r>
+              <a:rPr sz="4800" b="1" i="0">
+                <a:solidFill>
+                  <a:srgbClr val="FFFFFF"/>
+                </a:solidFill>
+                <a:latin typeface="Arial"/>
+              </a:rPr>
+              <a:t>Você me levou através do fogo</a:t>
+            </a:r>
+          </a:p>
+        </p:txBody>
+      </p:sp>
+      <p:sp>
+        <p:nvSpPr>
+          <p:cNvPr id="4" name="TextBox 3"/>
+          <p:cNvSpPr txBox="1"/>
+          <p:nvPr/>
+        </p:nvSpPr>
+        <p:spPr>
+          <a:xfrm>
+            <a:off x="640080" y="4128516"/>
+            <a:ext cx="10911535" cy="310896"/>
+          </a:xfrm>
+          <a:prstGeom prst="rect">
+            <a:avLst/>
+          </a:prstGeom>
+          <a:noFill/>
+        </p:spPr>
+        <p:txBody>
+          <a:bodyPr wrap="square">
+            <a:spAutoFit/>
+          </a:bodyPr>
+          <a:lstStyle/>
+          <a:p>
+            <a:pPr algn="ctr"/>
+            <a:r>
+              <a:rPr sz="2000" b="0" i="0">
+                <a:solidFill>
+                  <a:srgbClr val="828282"/>
                 </a:solidFill>
                 <a:latin typeface="Arial"/>
               </a:rPr>
@@ -7262,66 +6527,31 @@
       </p:sp>
       <p:sp>
         <p:nvSpPr>
-          <p:cNvPr id="4" name="TextBox 3"/>
-          <p:cNvSpPr txBox="1"/>
-          <p:nvPr/>
-        </p:nvSpPr>
-        <p:spPr>
-          <a:xfrm>
-            <a:off x="594360" y="3529584"/>
-            <a:ext cx="11002975" cy="685800"/>
-          </a:xfrm>
-          <a:prstGeom prst="rect">
-            <a:avLst/>
-          </a:prstGeom>
-          <a:noFill/>
-        </p:spPr>
-        <p:txBody>
-          <a:bodyPr wrap="square">
-            <a:spAutoFit/>
-          </a:bodyPr>
-          <a:lstStyle/>
-          <a:p>
-            <a:pPr algn="ctr"/>
-            <a:r>
-              <a:rPr sz="4400" b="1" i="0">
-                <a:solidFill>
-                  <a:srgbClr val="FFFFFF"/>
-                </a:solidFill>
-                <a:latin typeface="Arial"/>
-              </a:rPr>
-              <a:t>Você me levou através do fogo</a:t>
-            </a:r>
-          </a:p>
-        </p:txBody>
-      </p:sp>
-      <p:sp>
-        <p:nvSpPr>
           <p:cNvPr id="5" name="TextBox 4"/>
           <p:cNvSpPr txBox="1"/>
           <p:nvPr/>
         </p:nvSpPr>
         <p:spPr>
           <a:xfrm>
-            <a:off x="594360" y="4251960"/>
-            <a:ext cx="11002975" cy="347472"/>
-          </a:xfrm>
-          <a:prstGeom prst="rect">
-            <a:avLst/>
-          </a:prstGeom>
-          <a:noFill/>
-        </p:spPr>
-        <p:txBody>
-          <a:bodyPr wrap="square">
-            <a:spAutoFit/>
-          </a:bodyPr>
-          <a:lstStyle/>
-          <a:p>
-            <a:pPr algn="ctr"/>
-            <a:r>
-              <a:rPr sz="2200" b="0" i="1">
-                <a:solidFill>
-                  <a:srgbClr val="8C8C8C"/>
+            <a:off x="640080" y="4494276"/>
+            <a:ext cx="10911535" cy="310896"/>
+          </a:xfrm>
+          <a:prstGeom prst="rect">
+            <a:avLst/>
+          </a:prstGeom>
+          <a:noFill/>
+        </p:spPr>
+        <p:txBody>
+          <a:bodyPr wrap="square">
+            <a:spAutoFit/>
+          </a:bodyPr>
+          <a:lstStyle/>
+          <a:p>
+            <a:pPr algn="ctr"/>
+            <a:r>
+              <a:rPr sz="2000" b="0" i="0">
+                <a:solidFill>
+                  <a:srgbClr val="828282"/>
                 </a:solidFill>
                 <a:latin typeface="Arial"/>
               </a:rPr>

--- a/output_pptx/Goodness_Of_God.pptx
+++ b/output_pptx/Goodness_Of_God.pptx
@@ -3424,6 +3424,76 @@
           </a:p>
         </p:txBody>
       </p:sp>
+      <p:sp>
+        <p:nvSpPr>
+          <p:cNvPr id="4" name="TextBox 3"/>
+          <p:cNvSpPr txBox="1"/>
+          <p:nvPr/>
+        </p:nvSpPr>
+        <p:spPr>
+          <a:xfrm>
+            <a:off x="640080" y="4128516"/>
+            <a:ext cx="10911535" cy="310896"/>
+          </a:xfrm>
+          <a:prstGeom prst="rect">
+            <a:avLst/>
+          </a:prstGeom>
+          <a:noFill/>
+        </p:spPr>
+        <p:txBody>
+          <a:bodyPr wrap="square">
+            <a:spAutoFit/>
+          </a:bodyPr>
+          <a:lstStyle/>
+          <a:p>
+            <a:pPr algn="ctr"/>
+            <a:r>
+              <a:rPr sz="2000" b="0" i="0">
+                <a:solidFill>
+                  <a:srgbClr val="828282"/>
+                </a:solidFill>
+                <a:latin typeface="Arial"/>
+              </a:rPr>
+              <a:t>私の人生を捧げて</a:t>
+            </a:r>
+          </a:p>
+        </p:txBody>
+      </p:sp>
+      <p:sp>
+        <p:nvSpPr>
+          <p:cNvPr id="5" name="TextBox 4"/>
+          <p:cNvSpPr txBox="1"/>
+          <p:nvPr/>
+        </p:nvSpPr>
+        <p:spPr>
+          <a:xfrm>
+            <a:off x="640080" y="4494276"/>
+            <a:ext cx="10911535" cy="310896"/>
+          </a:xfrm>
+          <a:prstGeom prst="rect">
+            <a:avLst/>
+          </a:prstGeom>
+          <a:noFill/>
+        </p:spPr>
+        <p:txBody>
+          <a:bodyPr wrap="square">
+            <a:spAutoFit/>
+          </a:bodyPr>
+          <a:lstStyle/>
+          <a:p>
+            <a:pPr algn="ctr"/>
+            <a:r>
+              <a:rPr sz="2000" b="0" i="0">
+                <a:solidFill>
+                  <a:srgbClr val="828282"/>
+                </a:solidFill>
+                <a:latin typeface="Arial"/>
+              </a:rPr>
+              <a:t>今、私は降伏しています</a:t>
+            </a:r>
+          </a:p>
+        </p:txBody>
+      </p:sp>
     </p:spTree>
   </p:cSld>
   <p:clrMapOvr>
@@ -3520,6 +3590,76 @@
           </a:p>
         </p:txBody>
       </p:sp>
+      <p:sp>
+        <p:nvSpPr>
+          <p:cNvPr id="4" name="TextBox 3"/>
+          <p:cNvSpPr txBox="1"/>
+          <p:nvPr/>
+        </p:nvSpPr>
+        <p:spPr>
+          <a:xfrm>
+            <a:off x="640080" y="4128516"/>
+            <a:ext cx="10911535" cy="310896"/>
+          </a:xfrm>
+          <a:prstGeom prst="rect">
+            <a:avLst/>
+          </a:prstGeom>
+          <a:noFill/>
+        </p:spPr>
+        <p:txBody>
+          <a:bodyPr wrap="square">
+            <a:spAutoFit/>
+          </a:bodyPr>
+          <a:lstStyle/>
+          <a:p>
+            <a:pPr algn="ctr"/>
+            <a:r>
+              <a:rPr sz="2000" b="0" i="0">
+                <a:solidFill>
+                  <a:srgbClr val="828282"/>
+                </a:solidFill>
+                <a:latin typeface="Arial"/>
+              </a:rPr>
+              <a:t>私はあなたにすべてを与えます</a:t>
+            </a:r>
+          </a:p>
+        </p:txBody>
+      </p:sp>
+      <p:sp>
+        <p:nvSpPr>
+          <p:cNvPr id="5" name="TextBox 4"/>
+          <p:cNvSpPr txBox="1"/>
+          <p:nvPr/>
+        </p:nvSpPr>
+        <p:spPr>
+          <a:xfrm>
+            <a:off x="640080" y="4494276"/>
+            <a:ext cx="10911535" cy="310896"/>
+          </a:xfrm>
+          <a:prstGeom prst="rect">
+            <a:avLst/>
+          </a:prstGeom>
+          <a:noFill/>
+        </p:spPr>
+        <p:txBody>
+          <a:bodyPr wrap="square">
+            <a:spAutoFit/>
+          </a:bodyPr>
+          <a:lstStyle/>
+          <a:p>
+            <a:pPr algn="ctr"/>
+            <a:r>
+              <a:rPr sz="2000" b="0" i="0">
+                <a:solidFill>
+                  <a:srgbClr val="828282"/>
+                </a:solidFill>
+                <a:latin typeface="Arial"/>
+              </a:rPr>
+              <a:t>私の人生を捧げて</a:t>
+            </a:r>
+          </a:p>
+        </p:txBody>
+      </p:sp>
     </p:spTree>
   </p:cSld>
   <p:clrMapOvr>
@@ -3616,6 +3756,76 @@
           </a:p>
         </p:txBody>
       </p:sp>
+      <p:sp>
+        <p:nvSpPr>
+          <p:cNvPr id="4" name="TextBox 3"/>
+          <p:cNvSpPr txBox="1"/>
+          <p:nvPr/>
+        </p:nvSpPr>
+        <p:spPr>
+          <a:xfrm>
+            <a:off x="640080" y="4128516"/>
+            <a:ext cx="10911535" cy="310896"/>
+          </a:xfrm>
+          <a:prstGeom prst="rect">
+            <a:avLst/>
+          </a:prstGeom>
+          <a:noFill/>
+        </p:spPr>
+        <p:txBody>
+          <a:bodyPr wrap="square">
+            <a:spAutoFit/>
+          </a:bodyPr>
+          <a:lstStyle/>
+          <a:p>
+            <a:pPr algn="ctr"/>
+            <a:r>
+              <a:rPr sz="2000" b="0" i="0">
+                <a:solidFill>
+                  <a:srgbClr val="828282"/>
+                </a:solidFill>
+                <a:latin typeface="Arial"/>
+              </a:rPr>
+              <a:t>今、私は降伏しています</a:t>
+            </a:r>
+          </a:p>
+        </p:txBody>
+      </p:sp>
+      <p:sp>
+        <p:nvSpPr>
+          <p:cNvPr id="5" name="TextBox 4"/>
+          <p:cNvSpPr txBox="1"/>
+          <p:nvPr/>
+        </p:nvSpPr>
+        <p:spPr>
+          <a:xfrm>
+            <a:off x="640080" y="4494276"/>
+            <a:ext cx="10911535" cy="310896"/>
+          </a:xfrm>
+          <a:prstGeom prst="rect">
+            <a:avLst/>
+          </a:prstGeom>
+          <a:noFill/>
+        </p:spPr>
+        <p:txBody>
+          <a:bodyPr wrap="square">
+            <a:spAutoFit/>
+          </a:bodyPr>
+          <a:lstStyle/>
+          <a:p>
+            <a:pPr algn="ctr"/>
+            <a:r>
+              <a:rPr sz="2000" b="0" i="0">
+                <a:solidFill>
+                  <a:srgbClr val="828282"/>
+                </a:solidFill>
+                <a:latin typeface="Arial"/>
+              </a:rPr>
+              <a:t>私はあなたにすべてを与えます</a:t>
+            </a:r>
+          </a:p>
+        </p:txBody>
+      </p:sp>
     </p:spTree>
   </p:cSld>
   <p:clrMapOvr>
@@ -4044,6 +4254,76 @@
           </a:p>
         </p:txBody>
       </p:sp>
+      <p:sp>
+        <p:nvSpPr>
+          <p:cNvPr id="4" name="TextBox 3"/>
+          <p:cNvSpPr txBox="1"/>
+          <p:nvPr/>
+        </p:nvSpPr>
+        <p:spPr>
+          <a:xfrm>
+            <a:off x="640080" y="4128516"/>
+            <a:ext cx="10911535" cy="310896"/>
+          </a:xfrm>
+          <a:prstGeom prst="rect">
+            <a:avLst/>
+          </a:prstGeom>
+          <a:noFill/>
+        </p:spPr>
+        <p:txBody>
+          <a:bodyPr wrap="square">
+            <a:spAutoFit/>
+          </a:bodyPr>
+          <a:lstStyle/>
+          <a:p>
+            <a:pPr algn="ctr"/>
+            <a:r>
+              <a:rPr sz="2000" b="0" i="0">
+                <a:solidFill>
+                  <a:srgbClr val="828282"/>
+                </a:solidFill>
+                <a:latin typeface="Arial"/>
+              </a:rPr>
+              <a:t>そして私は神の恵みの中で生きてきました</a:t>
+            </a:r>
+          </a:p>
+        </p:txBody>
+      </p:sp>
+      <p:sp>
+        <p:nvSpPr>
+          <p:cNvPr id="5" name="TextBox 4"/>
+          <p:cNvSpPr txBox="1"/>
+          <p:nvPr/>
+        </p:nvSpPr>
+        <p:spPr>
+          <a:xfrm>
+            <a:off x="640080" y="4494276"/>
+            <a:ext cx="10911535" cy="310896"/>
+          </a:xfrm>
+          <a:prstGeom prst="rect">
+            <a:avLst/>
+          </a:prstGeom>
+          <a:noFill/>
+        </p:spPr>
+        <p:txBody>
+          <a:bodyPr wrap="square">
+            <a:spAutoFit/>
+          </a:bodyPr>
+          <a:lstStyle/>
+          <a:p>
+            <a:pPr algn="ctr"/>
+            <a:r>
+              <a:rPr sz="2000" b="0" i="0">
+                <a:solidFill>
+                  <a:srgbClr val="828282"/>
+                </a:solidFill>
+                <a:latin typeface="Arial"/>
+              </a:rPr>
+              <a:t>私の人生のすべてにおいて、あなたは誠実でした</a:t>
+            </a:r>
+          </a:p>
+        </p:txBody>
+      </p:sp>
     </p:spTree>
   </p:cSld>
   <p:clrMapOvr>
@@ -4140,6 +4420,76 @@
           </a:p>
         </p:txBody>
       </p:sp>
+      <p:sp>
+        <p:nvSpPr>
+          <p:cNvPr id="4" name="TextBox 3"/>
+          <p:cNvSpPr txBox="1"/>
+          <p:nvPr/>
+        </p:nvSpPr>
+        <p:spPr>
+          <a:xfrm>
+            <a:off x="640080" y="4128516"/>
+            <a:ext cx="10911535" cy="310896"/>
+          </a:xfrm>
+          <a:prstGeom prst="rect">
+            <a:avLst/>
+          </a:prstGeom>
+          <a:noFill/>
+        </p:spPr>
+        <p:txBody>
+          <a:bodyPr wrap="square">
+            <a:spAutoFit/>
+          </a:bodyPr>
+          <a:lstStyle/>
+          <a:p>
+            <a:pPr algn="ctr"/>
+            <a:r>
+              <a:rPr sz="2000" b="0" i="0">
+                <a:solidFill>
+                  <a:srgbClr val="828282"/>
+                </a:solidFill>
+                <a:latin typeface="Arial"/>
+              </a:rPr>
+              <a:t>私の人生のすべてにおいて、あなたはとても善良です</a:t>
+            </a:r>
+          </a:p>
+        </p:txBody>
+      </p:sp>
+      <p:sp>
+        <p:nvSpPr>
+          <p:cNvPr id="5" name="TextBox 4"/>
+          <p:cNvSpPr txBox="1"/>
+          <p:nvPr/>
+        </p:nvSpPr>
+        <p:spPr>
+          <a:xfrm>
+            <a:off x="640080" y="4494276"/>
+            <a:ext cx="10911535" cy="310896"/>
+          </a:xfrm>
+          <a:prstGeom prst="rect">
+            <a:avLst/>
+          </a:prstGeom>
+          <a:noFill/>
+        </p:spPr>
+        <p:txBody>
+          <a:bodyPr wrap="square">
+            <a:spAutoFit/>
+          </a:bodyPr>
+          <a:lstStyle/>
+          <a:p>
+            <a:pPr algn="ctr"/>
+            <a:r>
+              <a:rPr sz="2000" b="0" i="0">
+                <a:solidFill>
+                  <a:srgbClr val="828282"/>
+                </a:solidFill>
+                <a:latin typeface="Arial"/>
+              </a:rPr>
+              <a:t>一呼吸ごとに</a:t>
+            </a:r>
+          </a:p>
+        </p:txBody>
+      </p:sp>
     </p:spTree>
   </p:cSld>
   <p:clrMapOvr>
@@ -5276,6 +5626,76 @@
           </a:p>
         </p:txBody>
       </p:sp>
+      <p:sp>
+        <p:nvSpPr>
+          <p:cNvPr id="4" name="TextBox 3"/>
+          <p:cNvSpPr txBox="1"/>
+          <p:nvPr/>
+        </p:nvSpPr>
+        <p:spPr>
+          <a:xfrm>
+            <a:off x="640080" y="4128516"/>
+            <a:ext cx="10911535" cy="310896"/>
+          </a:xfrm>
+          <a:prstGeom prst="rect">
+            <a:avLst/>
+          </a:prstGeom>
+          <a:noFill/>
+        </p:spPr>
+        <p:txBody>
+          <a:bodyPr wrap="square">
+            <a:spAutoFit/>
+          </a:bodyPr>
+          <a:lstStyle/>
+          <a:p>
+            <a:pPr algn="ctr"/>
+            <a:r>
+              <a:rPr sz="2000" b="0" i="0">
+                <a:solidFill>
+                  <a:srgbClr val="828282"/>
+                </a:solidFill>
+                <a:latin typeface="Arial"/>
+              </a:rPr>
+              <a:t>私の人生を捧げて</a:t>
+            </a:r>
+          </a:p>
+        </p:txBody>
+      </p:sp>
+      <p:sp>
+        <p:nvSpPr>
+          <p:cNvPr id="5" name="TextBox 4"/>
+          <p:cNvSpPr txBox="1"/>
+          <p:nvPr/>
+        </p:nvSpPr>
+        <p:spPr>
+          <a:xfrm>
+            <a:off x="640080" y="4494276"/>
+            <a:ext cx="10911535" cy="310896"/>
+          </a:xfrm>
+          <a:prstGeom prst="rect">
+            <a:avLst/>
+          </a:prstGeom>
+          <a:noFill/>
+        </p:spPr>
+        <p:txBody>
+          <a:bodyPr wrap="square">
+            <a:spAutoFit/>
+          </a:bodyPr>
+          <a:lstStyle/>
+          <a:p>
+            <a:pPr algn="ctr"/>
+            <a:r>
+              <a:rPr sz="2000" b="0" i="0">
+                <a:solidFill>
+                  <a:srgbClr val="828282"/>
+                </a:solidFill>
+                <a:latin typeface="Arial"/>
+              </a:rPr>
+              <a:t>今、私は降伏しています</a:t>
+            </a:r>
+          </a:p>
+        </p:txBody>
+      </p:sp>
     </p:spTree>
   </p:cSld>
   <p:clrMapOvr>
@@ -5372,6 +5792,76 @@
           </a:p>
         </p:txBody>
       </p:sp>
+      <p:sp>
+        <p:nvSpPr>
+          <p:cNvPr id="4" name="TextBox 3"/>
+          <p:cNvSpPr txBox="1"/>
+          <p:nvPr/>
+        </p:nvSpPr>
+        <p:spPr>
+          <a:xfrm>
+            <a:off x="640080" y="4128516"/>
+            <a:ext cx="10911535" cy="310896"/>
+          </a:xfrm>
+          <a:prstGeom prst="rect">
+            <a:avLst/>
+          </a:prstGeom>
+          <a:noFill/>
+        </p:spPr>
+        <p:txBody>
+          <a:bodyPr wrap="square">
+            <a:spAutoFit/>
+          </a:bodyPr>
+          <a:lstStyle/>
+          <a:p>
+            <a:pPr algn="ctr"/>
+            <a:r>
+              <a:rPr sz="2000" b="0" i="0">
+                <a:solidFill>
+                  <a:srgbClr val="828282"/>
+                </a:solidFill>
+                <a:latin typeface="Arial"/>
+              </a:rPr>
+              <a:t>私はあなたにすべてを与えます</a:t>
+            </a:r>
+          </a:p>
+        </p:txBody>
+      </p:sp>
+      <p:sp>
+        <p:nvSpPr>
+          <p:cNvPr id="5" name="TextBox 4"/>
+          <p:cNvSpPr txBox="1"/>
+          <p:nvPr/>
+        </p:nvSpPr>
+        <p:spPr>
+          <a:xfrm>
+            <a:off x="640080" y="4494276"/>
+            <a:ext cx="10911535" cy="310896"/>
+          </a:xfrm>
+          <a:prstGeom prst="rect">
+            <a:avLst/>
+          </a:prstGeom>
+          <a:noFill/>
+        </p:spPr>
+        <p:txBody>
+          <a:bodyPr wrap="square">
+            <a:spAutoFit/>
+          </a:bodyPr>
+          <a:lstStyle/>
+          <a:p>
+            <a:pPr algn="ctr"/>
+            <a:r>
+              <a:rPr sz="2000" b="0" i="0">
+                <a:solidFill>
+                  <a:srgbClr val="828282"/>
+                </a:solidFill>
+                <a:latin typeface="Arial"/>
+              </a:rPr>
+              <a:t>私の人生を捧げて</a:t>
+            </a:r>
+          </a:p>
+        </p:txBody>
+      </p:sp>
     </p:spTree>
   </p:cSld>
   <p:clrMapOvr>
@@ -5468,6 +5958,76 @@
           </a:p>
         </p:txBody>
       </p:sp>
+      <p:sp>
+        <p:nvSpPr>
+          <p:cNvPr id="4" name="TextBox 3"/>
+          <p:cNvSpPr txBox="1"/>
+          <p:nvPr/>
+        </p:nvSpPr>
+        <p:spPr>
+          <a:xfrm>
+            <a:off x="640080" y="4128516"/>
+            <a:ext cx="10911535" cy="310896"/>
+          </a:xfrm>
+          <a:prstGeom prst="rect">
+            <a:avLst/>
+          </a:prstGeom>
+          <a:noFill/>
+        </p:spPr>
+        <p:txBody>
+          <a:bodyPr wrap="square">
+            <a:spAutoFit/>
+          </a:bodyPr>
+          <a:lstStyle/>
+          <a:p>
+            <a:pPr algn="ctr"/>
+            <a:r>
+              <a:rPr sz="2000" b="0" i="0">
+                <a:solidFill>
+                  <a:srgbClr val="828282"/>
+                </a:solidFill>
+                <a:latin typeface="Arial"/>
+              </a:rPr>
+              <a:t>今、私は降伏しています</a:t>
+            </a:r>
+          </a:p>
+        </p:txBody>
+      </p:sp>
+      <p:sp>
+        <p:nvSpPr>
+          <p:cNvPr id="5" name="TextBox 4"/>
+          <p:cNvSpPr txBox="1"/>
+          <p:nvPr/>
+        </p:nvSpPr>
+        <p:spPr>
+          <a:xfrm>
+            <a:off x="640080" y="4494276"/>
+            <a:ext cx="10911535" cy="310896"/>
+          </a:xfrm>
+          <a:prstGeom prst="rect">
+            <a:avLst/>
+          </a:prstGeom>
+          <a:noFill/>
+        </p:spPr>
+        <p:txBody>
+          <a:bodyPr wrap="square">
+            <a:spAutoFit/>
+          </a:bodyPr>
+          <a:lstStyle/>
+          <a:p>
+            <a:pPr algn="ctr"/>
+            <a:r>
+              <a:rPr sz="2000" b="0" i="0">
+                <a:solidFill>
+                  <a:srgbClr val="828282"/>
+                </a:solidFill>
+                <a:latin typeface="Arial"/>
+              </a:rPr>
+              <a:t>私はあなたにすべてを与えます</a:t>
+            </a:r>
+          </a:p>
+        </p:txBody>
+      </p:sp>
     </p:spTree>
   </p:cSld>
   <p:clrMapOvr>
@@ -6036,6 +6596,76 @@
           </a:p>
         </p:txBody>
       </p:sp>
+      <p:sp>
+        <p:nvSpPr>
+          <p:cNvPr id="4" name="TextBox 3"/>
+          <p:cNvSpPr txBox="1"/>
+          <p:nvPr/>
+        </p:nvSpPr>
+        <p:spPr>
+          <a:xfrm>
+            <a:off x="640080" y="4128516"/>
+            <a:ext cx="10911535" cy="310896"/>
+          </a:xfrm>
+          <a:prstGeom prst="rect">
+            <a:avLst/>
+          </a:prstGeom>
+          <a:noFill/>
+        </p:spPr>
+        <p:txBody>
+          <a:bodyPr wrap="square">
+            <a:spAutoFit/>
+          </a:bodyPr>
+          <a:lstStyle/>
+          <a:p>
+            <a:pPr algn="ctr"/>
+            <a:r>
+              <a:rPr sz="2000" b="0" i="0">
+                <a:solidFill>
+                  <a:srgbClr val="828282"/>
+                </a:solidFill>
+                <a:latin typeface="Arial"/>
+              </a:rPr>
+              <a:t>神の恵み</a:t>
+            </a:r>
+          </a:p>
+        </p:txBody>
+      </p:sp>
+      <p:sp>
+        <p:nvSpPr>
+          <p:cNvPr id="5" name="TextBox 4"/>
+          <p:cNvSpPr txBox="1"/>
+          <p:nvPr/>
+        </p:nvSpPr>
+        <p:spPr>
+          <a:xfrm>
+            <a:off x="640080" y="4494276"/>
+            <a:ext cx="10911535" cy="310896"/>
+          </a:xfrm>
+          <a:prstGeom prst="rect">
+            <a:avLst/>
+          </a:prstGeom>
+          <a:noFill/>
+        </p:spPr>
+        <p:txBody>
+          <a:bodyPr wrap="square">
+            <a:spAutoFit/>
+          </a:bodyPr>
+          <a:lstStyle/>
+          <a:p>
+            <a:pPr algn="ctr"/>
+            <a:r>
+              <a:rPr sz="2000" b="0" i="0">
+                <a:solidFill>
+                  <a:srgbClr val="828282"/>
+                </a:solidFill>
+                <a:latin typeface="Arial"/>
+              </a:rPr>
+              <a:t>主よ、私はあなたを愛しています</a:t>
+            </a:r>
+          </a:p>
+        </p:txBody>
+      </p:sp>
     </p:spTree>
   </p:cSld>
   <p:clrMapOvr>
@@ -6132,6 +6762,76 @@
           </a:p>
         </p:txBody>
       </p:sp>
+      <p:sp>
+        <p:nvSpPr>
+          <p:cNvPr id="4" name="TextBox 3"/>
+          <p:cNvSpPr txBox="1"/>
+          <p:nvPr/>
+        </p:nvSpPr>
+        <p:spPr>
+          <a:xfrm>
+            <a:off x="640080" y="4128516"/>
+            <a:ext cx="10911535" cy="310896"/>
+          </a:xfrm>
+          <a:prstGeom prst="rect">
+            <a:avLst/>
+          </a:prstGeom>
+          <a:noFill/>
+        </p:spPr>
+        <p:txBody>
+          <a:bodyPr wrap="square">
+            <a:spAutoFit/>
+          </a:bodyPr>
+          <a:lstStyle/>
+          <a:p>
+            <a:pPr algn="ctr"/>
+            <a:r>
+              <a:rPr sz="2000" b="0" i="0">
+                <a:solidFill>
+                  <a:srgbClr val="828282"/>
+                </a:solidFill>
+                <a:latin typeface="Arial"/>
+              </a:rPr>
+              <a:t>あなたの慈悲は決して私を見捨てません</a:t>
+            </a:r>
+          </a:p>
+        </p:txBody>
+      </p:sp>
+      <p:sp>
+        <p:nvSpPr>
+          <p:cNvPr id="5" name="TextBox 4"/>
+          <p:cNvSpPr txBox="1"/>
+          <p:nvPr/>
+        </p:nvSpPr>
+        <p:spPr>
+          <a:xfrm>
+            <a:off x="640080" y="4494276"/>
+            <a:ext cx="10911535" cy="310896"/>
+          </a:xfrm>
+          <a:prstGeom prst="rect">
+            <a:avLst/>
+          </a:prstGeom>
+          <a:noFill/>
+        </p:spPr>
+        <p:txBody>
+          <a:bodyPr wrap="square">
+            <a:spAutoFit/>
+          </a:bodyPr>
+          <a:lstStyle/>
+          <a:p>
+            <a:pPr algn="ctr"/>
+            <a:r>
+              <a:rPr sz="2000" b="0" i="0">
+                <a:solidFill>
+                  <a:srgbClr val="828282"/>
+                </a:solidFill>
+                <a:latin typeface="Arial"/>
+              </a:rPr>
+              <a:t>私のすべての日々</a:t>
+            </a:r>
+          </a:p>
+        </p:txBody>
+      </p:sp>
     </p:spTree>
   </p:cSld>
   <p:clrMapOvr>
@@ -6224,6 +6924,76 @@
                 <a:latin typeface="Arial"/>
               </a:rPr>
               <a:t>A partir do momento que eu acordo</a:t>
+            </a:r>
+          </a:p>
+        </p:txBody>
+      </p:sp>
+      <p:sp>
+        <p:nvSpPr>
+          <p:cNvPr id="4" name="TextBox 3"/>
+          <p:cNvSpPr txBox="1"/>
+          <p:nvPr/>
+        </p:nvSpPr>
+        <p:spPr>
+          <a:xfrm>
+            <a:off x="640080" y="4128516"/>
+            <a:ext cx="10911535" cy="310896"/>
+          </a:xfrm>
+          <a:prstGeom prst="rect">
+            <a:avLst/>
+          </a:prstGeom>
+          <a:noFill/>
+        </p:spPr>
+        <p:txBody>
+          <a:bodyPr wrap="square">
+            <a:spAutoFit/>
+          </a:bodyPr>
+          <a:lstStyle/>
+          <a:p>
+            <a:pPr algn="ctr"/>
+            <a:r>
+              <a:rPr sz="2000" b="0" i="0">
+                <a:solidFill>
+                  <a:srgbClr val="828282"/>
+                </a:solidFill>
+                <a:latin typeface="Arial"/>
+              </a:rPr>
+              <a:t>私はあなたの手に守られました</a:t>
+            </a:r>
+          </a:p>
+        </p:txBody>
+      </p:sp>
+      <p:sp>
+        <p:nvSpPr>
+          <p:cNvPr id="5" name="TextBox 4"/>
+          <p:cNvSpPr txBox="1"/>
+          <p:nvPr/>
+        </p:nvSpPr>
+        <p:spPr>
+          <a:xfrm>
+            <a:off x="640080" y="4494276"/>
+            <a:ext cx="10911535" cy="310896"/>
+          </a:xfrm>
+          <a:prstGeom prst="rect">
+            <a:avLst/>
+          </a:prstGeom>
+          <a:noFill/>
+        </p:spPr>
+        <p:txBody>
+          <a:bodyPr wrap="square">
+            <a:spAutoFit/>
+          </a:bodyPr>
+          <a:lstStyle/>
+          <a:p>
+            <a:pPr algn="ctr"/>
+            <a:r>
+              <a:rPr sz="2000" b="0" i="0">
+                <a:solidFill>
+                  <a:srgbClr val="828282"/>
+                </a:solidFill>
+                <a:latin typeface="Arial"/>
+              </a:rPr>
+              <a:t>私が目覚めたその時から</a:t>
             </a:r>
           </a:p>
         </p:txBody>
